--- a/tree/Tree.pptx
+++ b/tree/Tree.pptx
@@ -9084,7 +9084,15 @@
                   <a:schemeClr val="bg1"/>
                 </a:solidFill>
               </a:rPr>
-              <a:t>Size = 6</a:t>
+              <a:t>Size </a:t>
+            </a:r>
+            <a:r>
+              <a:rPr lang="en-PH" sz="2500" b="1">
+                <a:solidFill>
+                  <a:schemeClr val="bg1"/>
+                </a:solidFill>
+              </a:rPr>
+              <a:t>= 5</a:t>
             </a:r>
             <a:endParaRPr lang="en-US" sz="2500" dirty="0">
               <a:solidFill>
@@ -13432,13 +13440,13 @@
   <p:clrMapOvr>
     <a:masterClrMapping/>
   </p:clrMapOvr>
-  <mc:AlternateContent xmlns:mc="http://schemas.openxmlformats.org/markup-compatibility/2006">
-    <mc:Choice xmlns:p159="http://schemas.microsoft.com/office/powerpoint/2015/09/main" Requires="p159">
+  <mc:AlternateContent xmlns:mc="http://schemas.openxmlformats.org/markup-compatibility/2006" xmlns:p159="http://schemas.microsoft.com/office/powerpoint/2015/09/main">
+    <mc:Choice Requires="p159">
       <p:transition xmlns:p14="http://schemas.microsoft.com/office/powerpoint/2010/main" spd="slow" p14:dur="2000">
         <p159:morph option="byObject"/>
       </p:transition>
     </mc:Choice>
-    <mc:Fallback>
+    <mc:Fallback xmlns="">
       <p:transition spd="slow">
         <p:fade/>
       </p:transition>
@@ -20694,51 +20702,6 @@
       </p:sp>
       <p:sp>
         <p:nvSpPr>
-          <p:cNvPr id="6" name="TextBox 5">
-            <a:extLst>
-              <a:ext uri="{FF2B5EF4-FFF2-40B4-BE49-F238E27FC236}">
-                <a16:creationId xmlns:a16="http://schemas.microsoft.com/office/drawing/2014/main" id="{FCE1C65A-C61B-7518-B910-C13766332036}"/>
-              </a:ext>
-            </a:extLst>
-          </p:cNvPr>
-          <p:cNvSpPr txBox="1"/>
-          <p:nvPr/>
-        </p:nvSpPr>
-        <p:spPr>
-          <a:xfrm>
-            <a:off x="8116025" y="2818887"/>
-            <a:ext cx="1130972" cy="477054"/>
-          </a:xfrm>
-          <a:prstGeom prst="rect">
-            <a:avLst/>
-          </a:prstGeom>
-          <a:noFill/>
-        </p:spPr>
-        <p:txBody>
-          <a:bodyPr wrap="square">
-            <a:spAutoFit/>
-          </a:bodyPr>
-          <a:lstStyle/>
-          <a:p>
-            <a:pPr algn="ctr"/>
-            <a:r>
-              <a:rPr lang="en-PH" sz="2500" b="1" dirty="0">
-                <a:solidFill>
-                  <a:schemeClr val="bg1"/>
-                </a:solidFill>
-              </a:rPr>
-              <a:t>Parent</a:t>
-            </a:r>
-            <a:endParaRPr lang="en-US" sz="2500" dirty="0">
-              <a:solidFill>
-                <a:schemeClr val="bg1"/>
-              </a:solidFill>
-            </a:endParaRPr>
-          </a:p>
-        </p:txBody>
-      </p:sp>
-      <p:sp>
-        <p:nvSpPr>
           <p:cNvPr id="7" name="Oval 6">
             <a:extLst>
               <a:ext uri="{FF2B5EF4-FFF2-40B4-BE49-F238E27FC236}">
@@ -21160,50 +21123,6 @@
             <a:solidFill>
               <a:srgbClr val="AAAAAA"/>
             </a:solidFill>
-          </a:ln>
-        </p:spPr>
-        <p:style>
-          <a:lnRef idx="1">
-            <a:schemeClr val="accent1"/>
-          </a:lnRef>
-          <a:fillRef idx="0">
-            <a:schemeClr val="accent1"/>
-          </a:fillRef>
-          <a:effectRef idx="0">
-            <a:schemeClr val="accent1"/>
-          </a:effectRef>
-          <a:fontRef idx="minor">
-            <a:schemeClr val="tx1"/>
-          </a:fontRef>
-        </p:style>
-      </p:cxnSp>
-      <p:cxnSp>
-        <p:nvCxnSpPr>
-          <p:cNvPr id="20" name="Straight Arrow Connector 19">
-            <a:extLst>
-              <a:ext uri="{FF2B5EF4-FFF2-40B4-BE49-F238E27FC236}">
-                <a16:creationId xmlns:a16="http://schemas.microsoft.com/office/drawing/2014/main" id="{2AC6939B-9CB2-F7F0-AC60-B77E77F2CFFA}"/>
-              </a:ext>
-            </a:extLst>
-          </p:cNvPr>
-          <p:cNvCxnSpPr>
-            <a:cxnSpLocks/>
-          </p:cNvCxnSpPr>
-          <p:nvPr/>
-        </p:nvCxnSpPr>
-        <p:spPr>
-          <a:xfrm>
-            <a:off x="7490073" y="3047881"/>
-            <a:ext cx="703258" cy="0"/>
-          </a:xfrm>
-          <a:prstGeom prst="straightConnector1">
-            <a:avLst/>
-          </a:prstGeom>
-          <a:ln w="57150">
-            <a:solidFill>
-              <a:srgbClr val="AAAAAA"/>
-            </a:solidFill>
-            <a:tailEnd type="triangle"/>
           </a:ln>
         </p:spPr>
         <p:style>
@@ -22477,7 +22396,7 @@
         </p:nvSpPr>
         <p:spPr>
           <a:xfrm>
-            <a:off x="8116025" y="2818887"/>
+            <a:off x="7733863" y="2818887"/>
             <a:ext cx="1975032" cy="477054"/>
           </a:xfrm>
           <a:prstGeom prst="rect">
@@ -22498,7 +22417,7 @@
                   <a:schemeClr val="bg1"/>
                 </a:solidFill>
               </a:rPr>
-              <a:t>Parent/Child</a:t>
+              <a:t>Child</a:t>
             </a:r>
             <a:endParaRPr lang="en-US" sz="2500" dirty="0">
               <a:solidFill>
@@ -24882,6 +24801,15 @@
 </file>
 
 <file path=customXml/item1.xml><?xml version="1.0" encoding="utf-8"?>
+<?mso-contentType ?>
+<FormTemplates xmlns="http://schemas.microsoft.com/sharepoint/v3/contenttype/forms">
+  <Display>DocumentLibraryForm</Display>
+  <Edit>DocumentLibraryForm</Edit>
+  <New>DocumentLibraryForm</New>
+</FormTemplates>
+</file>
+
+<file path=customXml/item2.xml><?xml version="1.0" encoding="utf-8"?>
 <ct:contentTypeSchema xmlns:ct="http://schemas.microsoft.com/office/2006/metadata/contentType" xmlns:ma="http://schemas.microsoft.com/office/2006/metadata/properties/metaAttributes" ct:_="" ma:_="" ma:contentTypeName="Document" ma:contentTypeID="0x0101007188BDCA587B344BBA6CB1A93FAE6998" ma:contentTypeVersion="2" ma:contentTypeDescription="Create a new document." ma:contentTypeScope="" ma:versionID="7a8e4b6720badb2566a0cfeddfaf2856">
   <xsd:schema xmlns:xsd="http://www.w3.org/2001/XMLSchema" xmlns:xs="http://www.w3.org/2001/XMLSchema" xmlns:p="http://schemas.microsoft.com/office/2006/metadata/properties" xmlns:ns2="ba111d12-426d-4af0-bcb6-460e36974645" targetNamespace="http://schemas.microsoft.com/office/2006/metadata/properties" ma:root="true" ma:fieldsID="989b05398519136c88ba0a8d54e3c3da" ns2:_="">
     <xsd:import namespace="ba111d12-426d-4af0-bcb6-460e36974645"/>
@@ -25013,15 +24941,6 @@
 </ct:contentTypeSchema>
 </file>
 
-<file path=customXml/item2.xml><?xml version="1.0" encoding="utf-8"?>
-<?mso-contentType ?>
-<FormTemplates xmlns="http://schemas.microsoft.com/sharepoint/v3/contenttype/forms">
-  <Display>DocumentLibraryForm</Display>
-  <Edit>DocumentLibraryForm</Edit>
-  <New>DocumentLibraryForm</New>
-</FormTemplates>
-</file>
-
 <file path=customXml/item3.xml><?xml version="1.0" encoding="utf-8"?>
 <p:properties xmlns:p="http://schemas.microsoft.com/office/2006/metadata/properties" xmlns:xsi="http://www.w3.org/2001/XMLSchema-instance" xmlns:pc="http://schemas.microsoft.com/office/infopath/2007/PartnerControls">
   <documentManagement/>
@@ -25029,6 +24948,14 @@
 </file>
 
 <file path=customXml/itemProps1.xml><?xml version="1.0" encoding="utf-8"?>
+<ds:datastoreItem xmlns:ds="http://schemas.openxmlformats.org/officeDocument/2006/customXml" ds:itemID="{C598EE6F-E26B-42BB-A8C4-ECA40997D302}">
+  <ds:schemaRefs>
+    <ds:schemaRef ds:uri="http://schemas.microsoft.com/sharepoint/v3/contenttype/forms"/>
+  </ds:schemaRefs>
+</ds:datastoreItem>
+</file>
+
+<file path=customXml/itemProps2.xml><?xml version="1.0" encoding="utf-8"?>
 <ds:datastoreItem xmlns:ds="http://schemas.openxmlformats.org/officeDocument/2006/customXml" ds:itemID="{96C2DE78-7F75-46EF-BA1C-8DDDE33EBFA6}">
   <ds:schemaRefs>
     <ds:schemaRef ds:uri="http://schemas.microsoft.com/office/2006/metadata/contentType"/>
@@ -25046,14 +24973,6 @@
 </ds:datastoreItem>
 </file>
 
-<file path=customXml/itemProps2.xml><?xml version="1.0" encoding="utf-8"?>
-<ds:datastoreItem xmlns:ds="http://schemas.openxmlformats.org/officeDocument/2006/customXml" ds:itemID="{C598EE6F-E26B-42BB-A8C4-ECA40997D302}">
-  <ds:schemaRefs>
-    <ds:schemaRef ds:uri="http://schemas.microsoft.com/sharepoint/v3/contenttype/forms"/>
-  </ds:schemaRefs>
-</ds:datastoreItem>
-</file>
-
 <file path=customXml/itemProps3.xml><?xml version="1.0" encoding="utf-8"?>
 <ds:datastoreItem xmlns:ds="http://schemas.openxmlformats.org/officeDocument/2006/customXml" ds:itemID="{857C6131-C561-4201-AE06-D21CDE528BF4}">
   <ds:schemaRefs>

--- a/tree/Tree.pptx
+++ b/tree/Tree.pptx
@@ -5,7 +5,7 @@
     <p:sldMasterId id="2147483648" r:id="rId4"/>
   </p:sldMasterIdLst>
   <p:notesMasterIdLst>
-    <p:notesMasterId r:id="rId30"/>
+    <p:notesMasterId r:id="rId31"/>
   </p:notesMasterIdLst>
   <p:sldIdLst>
     <p:sldId id="293" r:id="rId5"/>
@@ -24,15 +24,16 @@
     <p:sldId id="307" r:id="rId18"/>
     <p:sldId id="308" r:id="rId19"/>
     <p:sldId id="309" r:id="rId20"/>
-    <p:sldId id="310" r:id="rId21"/>
-    <p:sldId id="311" r:id="rId22"/>
-    <p:sldId id="312" r:id="rId23"/>
-    <p:sldId id="313" r:id="rId24"/>
-    <p:sldId id="314" r:id="rId25"/>
-    <p:sldId id="315" r:id="rId26"/>
-    <p:sldId id="316" r:id="rId27"/>
-    <p:sldId id="317" r:id="rId28"/>
-    <p:sldId id="318" r:id="rId29"/>
+    <p:sldId id="320" r:id="rId21"/>
+    <p:sldId id="310" r:id="rId22"/>
+    <p:sldId id="311" r:id="rId23"/>
+    <p:sldId id="312" r:id="rId24"/>
+    <p:sldId id="313" r:id="rId25"/>
+    <p:sldId id="314" r:id="rId26"/>
+    <p:sldId id="315" r:id="rId27"/>
+    <p:sldId id="316" r:id="rId28"/>
+    <p:sldId id="317" r:id="rId29"/>
+    <p:sldId id="318" r:id="rId30"/>
   </p:sldIdLst>
   <p:sldSz cx="12192000" cy="6858000"/>
   <p:notesSz cx="6858000" cy="9144000"/>
@@ -1345,6 +1346,114 @@
         <p:cNvPr id="1" name="">
           <a:extLst>
             <a:ext uri="{FF2B5EF4-FFF2-40B4-BE49-F238E27FC236}">
+              <a16:creationId xmlns:a16="http://schemas.microsoft.com/office/drawing/2014/main" id="{80C10E4F-2E9E-1E78-F35D-0DE5CA438B9C}"/>
+            </a:ext>
+          </a:extLst>
+        </p:cNvPr>
+        <p:cNvGrpSpPr/>
+        <p:nvPr/>
+      </p:nvGrpSpPr>
+      <p:grpSpPr>
+        <a:xfrm>
+          <a:off x="0" y="0"/>
+          <a:ext cx="0" cy="0"/>
+          <a:chOff x="0" y="0"/>
+          <a:chExt cx="0" cy="0"/>
+        </a:xfrm>
+      </p:grpSpPr>
+      <p:sp>
+        <p:nvSpPr>
+          <p:cNvPr id="2" name="Slide Image Placeholder 1">
+            <a:extLst>
+              <a:ext uri="{FF2B5EF4-FFF2-40B4-BE49-F238E27FC236}">
+                <a16:creationId xmlns:a16="http://schemas.microsoft.com/office/drawing/2014/main" id="{E3635B78-6FD9-F49E-F8A6-80FB9330720F}"/>
+              </a:ext>
+            </a:extLst>
+          </p:cNvPr>
+          <p:cNvSpPr>
+            <a:spLocks noGrp="1" noRot="1" noChangeAspect="1"/>
+          </p:cNvSpPr>
+          <p:nvPr>
+            <p:ph type="sldImg"/>
+          </p:nvPr>
+        </p:nvSpPr>
+        <p:spPr/>
+      </p:sp>
+      <p:sp>
+        <p:nvSpPr>
+          <p:cNvPr id="3" name="Notes Placeholder 2">
+            <a:extLst>
+              <a:ext uri="{FF2B5EF4-FFF2-40B4-BE49-F238E27FC236}">
+                <a16:creationId xmlns:a16="http://schemas.microsoft.com/office/drawing/2014/main" id="{1438BE15-D626-05D7-8257-2EC3576F313D}"/>
+              </a:ext>
+            </a:extLst>
+          </p:cNvPr>
+          <p:cNvSpPr>
+            <a:spLocks noGrp="1"/>
+          </p:cNvSpPr>
+          <p:nvPr>
+            <p:ph type="body" idx="1"/>
+          </p:nvPr>
+        </p:nvSpPr>
+        <p:spPr/>
+        <p:txBody>
+          <a:bodyPr/>
+          <a:lstStyle/>
+          <a:p>
+            <a:endParaRPr lang="en-PH" dirty="0"/>
+          </a:p>
+        </p:txBody>
+      </p:sp>
+      <p:sp>
+        <p:nvSpPr>
+          <p:cNvPr id="4" name="Slide Number Placeholder 3">
+            <a:extLst>
+              <a:ext uri="{FF2B5EF4-FFF2-40B4-BE49-F238E27FC236}">
+                <a16:creationId xmlns:a16="http://schemas.microsoft.com/office/drawing/2014/main" id="{829F3BED-150C-EBB8-8D38-53E133D85D49}"/>
+              </a:ext>
+            </a:extLst>
+          </p:cNvPr>
+          <p:cNvSpPr>
+            <a:spLocks noGrp="1"/>
+          </p:cNvSpPr>
+          <p:nvPr>
+            <p:ph type="sldNum" sz="quarter" idx="5"/>
+          </p:nvPr>
+        </p:nvSpPr>
+        <p:spPr/>
+        <p:txBody>
+          <a:bodyPr/>
+          <a:lstStyle/>
+          <a:p>
+            <a:fld id="{FE90CCE9-4AAE-4E1F-85AD-521A406D6524}" type="slidenum">
+              <a:rPr lang="en-PH" smtClean="0"/>
+              <a:t>17</a:t>
+            </a:fld>
+            <a:endParaRPr lang="en-PH"/>
+          </a:p>
+        </p:txBody>
+      </p:sp>
+    </p:spTree>
+    <p:extLst>
+      <p:ext uri="{BB962C8B-B14F-4D97-AF65-F5344CB8AC3E}">
+        <p14:creationId xmlns:p14="http://schemas.microsoft.com/office/powerpoint/2010/main" val="2980238822"/>
+      </p:ext>
+    </p:extLst>
+  </p:cSld>
+  <p:clrMapOvr>
+    <a:masterClrMapping/>
+  </p:clrMapOvr>
+</p:notes>
+</file>
+
+<file path=ppt/notesSlides/notesSlide18.xml><?xml version="1.0" encoding="utf-8"?>
+<p:notes xmlns:a="http://schemas.openxmlformats.org/drawingml/2006/main" xmlns:r="http://schemas.openxmlformats.org/officeDocument/2006/relationships" xmlns:p="http://schemas.openxmlformats.org/presentationml/2006/main">
+  <p:cSld>
+    <p:spTree>
+      <p:nvGrpSpPr>
+        <p:cNvPr id="1" name="">
+          <a:extLst>
+            <a:ext uri="{FF2B5EF4-FFF2-40B4-BE49-F238E27FC236}">
               <a16:creationId xmlns:a16="http://schemas.microsoft.com/office/drawing/2014/main" id="{AC74013E-F732-9D8B-F3FC-A1B30B57AC4E}"/>
             </a:ext>
           </a:extLst>
@@ -1426,7 +1535,7 @@
           <a:p>
             <a:fld id="{FE90CCE9-4AAE-4E1F-85AD-521A406D6524}" type="slidenum">
               <a:rPr lang="en-PH" smtClean="0"/>
-              <a:t>17</a:t>
+              <a:t>18</a:t>
             </a:fld>
             <a:endParaRPr lang="en-PH"/>
           </a:p>
@@ -1445,7 +1554,7 @@
 </p:notes>
 </file>
 
-<file path=ppt/notesSlides/notesSlide18.xml><?xml version="1.0" encoding="utf-8"?>
+<file path=ppt/notesSlides/notesSlide19.xml><?xml version="1.0" encoding="utf-8"?>
 <p:notes xmlns:a="http://schemas.openxmlformats.org/drawingml/2006/main" xmlns:r="http://schemas.openxmlformats.org/officeDocument/2006/relationships" xmlns:p="http://schemas.openxmlformats.org/presentationml/2006/main">
   <p:cSld>
     <p:spTree>
@@ -1534,7 +1643,7 @@
           <a:p>
             <a:fld id="{FE90CCE9-4AAE-4E1F-85AD-521A406D6524}" type="slidenum">
               <a:rPr lang="en-PH" smtClean="0"/>
-              <a:t>18</a:t>
+              <a:t>19</a:t>
             </a:fld>
             <a:endParaRPr lang="en-PH"/>
           </a:p>
@@ -1544,114 +1653,6 @@
     <p:extLst>
       <p:ext uri="{BB962C8B-B14F-4D97-AF65-F5344CB8AC3E}">
         <p14:creationId xmlns:p14="http://schemas.microsoft.com/office/powerpoint/2010/main" val="569658961"/>
-      </p:ext>
-    </p:extLst>
-  </p:cSld>
-  <p:clrMapOvr>
-    <a:masterClrMapping/>
-  </p:clrMapOvr>
-</p:notes>
-</file>
-
-<file path=ppt/notesSlides/notesSlide19.xml><?xml version="1.0" encoding="utf-8"?>
-<p:notes xmlns:a="http://schemas.openxmlformats.org/drawingml/2006/main" xmlns:r="http://schemas.openxmlformats.org/officeDocument/2006/relationships" xmlns:p="http://schemas.openxmlformats.org/presentationml/2006/main">
-  <p:cSld>
-    <p:spTree>
-      <p:nvGrpSpPr>
-        <p:cNvPr id="1" name="">
-          <a:extLst>
-            <a:ext uri="{FF2B5EF4-FFF2-40B4-BE49-F238E27FC236}">
-              <a16:creationId xmlns:a16="http://schemas.microsoft.com/office/drawing/2014/main" id="{378C612A-C8DA-F8EF-D023-87D875FC8E97}"/>
-            </a:ext>
-          </a:extLst>
-        </p:cNvPr>
-        <p:cNvGrpSpPr/>
-        <p:nvPr/>
-      </p:nvGrpSpPr>
-      <p:grpSpPr>
-        <a:xfrm>
-          <a:off x="0" y="0"/>
-          <a:ext cx="0" cy="0"/>
-          <a:chOff x="0" y="0"/>
-          <a:chExt cx="0" cy="0"/>
-        </a:xfrm>
-      </p:grpSpPr>
-      <p:sp>
-        <p:nvSpPr>
-          <p:cNvPr id="2" name="Slide Image Placeholder 1">
-            <a:extLst>
-              <a:ext uri="{FF2B5EF4-FFF2-40B4-BE49-F238E27FC236}">
-                <a16:creationId xmlns:a16="http://schemas.microsoft.com/office/drawing/2014/main" id="{296F1C8C-D9C8-D5D3-C300-8AFE3E7EE9CC}"/>
-              </a:ext>
-            </a:extLst>
-          </p:cNvPr>
-          <p:cNvSpPr>
-            <a:spLocks noGrp="1" noRot="1" noChangeAspect="1"/>
-          </p:cNvSpPr>
-          <p:nvPr>
-            <p:ph type="sldImg"/>
-          </p:nvPr>
-        </p:nvSpPr>
-        <p:spPr/>
-      </p:sp>
-      <p:sp>
-        <p:nvSpPr>
-          <p:cNvPr id="3" name="Notes Placeholder 2">
-            <a:extLst>
-              <a:ext uri="{FF2B5EF4-FFF2-40B4-BE49-F238E27FC236}">
-                <a16:creationId xmlns:a16="http://schemas.microsoft.com/office/drawing/2014/main" id="{D91BEA19-B0AF-F77B-0BC0-414453EBE4A8}"/>
-              </a:ext>
-            </a:extLst>
-          </p:cNvPr>
-          <p:cNvSpPr>
-            <a:spLocks noGrp="1"/>
-          </p:cNvSpPr>
-          <p:nvPr>
-            <p:ph type="body" idx="1"/>
-          </p:nvPr>
-        </p:nvSpPr>
-        <p:spPr/>
-        <p:txBody>
-          <a:bodyPr/>
-          <a:lstStyle/>
-          <a:p>
-            <a:endParaRPr lang="en-PH" dirty="0"/>
-          </a:p>
-        </p:txBody>
-      </p:sp>
-      <p:sp>
-        <p:nvSpPr>
-          <p:cNvPr id="4" name="Slide Number Placeholder 3">
-            <a:extLst>
-              <a:ext uri="{FF2B5EF4-FFF2-40B4-BE49-F238E27FC236}">
-                <a16:creationId xmlns:a16="http://schemas.microsoft.com/office/drawing/2014/main" id="{13EFC20C-170A-402B-E3E6-E1894D86A017}"/>
-              </a:ext>
-            </a:extLst>
-          </p:cNvPr>
-          <p:cNvSpPr>
-            <a:spLocks noGrp="1"/>
-          </p:cNvSpPr>
-          <p:nvPr>
-            <p:ph type="sldNum" sz="quarter" idx="5"/>
-          </p:nvPr>
-        </p:nvSpPr>
-        <p:spPr/>
-        <p:txBody>
-          <a:bodyPr/>
-          <a:lstStyle/>
-          <a:p>
-            <a:fld id="{FE90CCE9-4AAE-4E1F-85AD-521A406D6524}" type="slidenum">
-              <a:rPr lang="en-PH" smtClean="0"/>
-              <a:t>19</a:t>
-            </a:fld>
-            <a:endParaRPr lang="en-PH"/>
-          </a:p>
-        </p:txBody>
-      </p:sp>
-    </p:spTree>
-    <p:extLst>
-      <p:ext uri="{BB962C8B-B14F-4D97-AF65-F5344CB8AC3E}">
-        <p14:creationId xmlns:p14="http://schemas.microsoft.com/office/powerpoint/2010/main" val="410263396"/>
       </p:ext>
     </p:extLst>
   </p:cSld>
@@ -1777,6 +1778,114 @@
         <p:cNvPr id="1" name="">
           <a:extLst>
             <a:ext uri="{FF2B5EF4-FFF2-40B4-BE49-F238E27FC236}">
+              <a16:creationId xmlns:a16="http://schemas.microsoft.com/office/drawing/2014/main" id="{378C612A-C8DA-F8EF-D023-87D875FC8E97}"/>
+            </a:ext>
+          </a:extLst>
+        </p:cNvPr>
+        <p:cNvGrpSpPr/>
+        <p:nvPr/>
+      </p:nvGrpSpPr>
+      <p:grpSpPr>
+        <a:xfrm>
+          <a:off x="0" y="0"/>
+          <a:ext cx="0" cy="0"/>
+          <a:chOff x="0" y="0"/>
+          <a:chExt cx="0" cy="0"/>
+        </a:xfrm>
+      </p:grpSpPr>
+      <p:sp>
+        <p:nvSpPr>
+          <p:cNvPr id="2" name="Slide Image Placeholder 1">
+            <a:extLst>
+              <a:ext uri="{FF2B5EF4-FFF2-40B4-BE49-F238E27FC236}">
+                <a16:creationId xmlns:a16="http://schemas.microsoft.com/office/drawing/2014/main" id="{296F1C8C-D9C8-D5D3-C300-8AFE3E7EE9CC}"/>
+              </a:ext>
+            </a:extLst>
+          </p:cNvPr>
+          <p:cNvSpPr>
+            <a:spLocks noGrp="1" noRot="1" noChangeAspect="1"/>
+          </p:cNvSpPr>
+          <p:nvPr>
+            <p:ph type="sldImg"/>
+          </p:nvPr>
+        </p:nvSpPr>
+        <p:spPr/>
+      </p:sp>
+      <p:sp>
+        <p:nvSpPr>
+          <p:cNvPr id="3" name="Notes Placeholder 2">
+            <a:extLst>
+              <a:ext uri="{FF2B5EF4-FFF2-40B4-BE49-F238E27FC236}">
+                <a16:creationId xmlns:a16="http://schemas.microsoft.com/office/drawing/2014/main" id="{D91BEA19-B0AF-F77B-0BC0-414453EBE4A8}"/>
+              </a:ext>
+            </a:extLst>
+          </p:cNvPr>
+          <p:cNvSpPr>
+            <a:spLocks noGrp="1"/>
+          </p:cNvSpPr>
+          <p:nvPr>
+            <p:ph type="body" idx="1"/>
+          </p:nvPr>
+        </p:nvSpPr>
+        <p:spPr/>
+        <p:txBody>
+          <a:bodyPr/>
+          <a:lstStyle/>
+          <a:p>
+            <a:endParaRPr lang="en-PH" dirty="0"/>
+          </a:p>
+        </p:txBody>
+      </p:sp>
+      <p:sp>
+        <p:nvSpPr>
+          <p:cNvPr id="4" name="Slide Number Placeholder 3">
+            <a:extLst>
+              <a:ext uri="{FF2B5EF4-FFF2-40B4-BE49-F238E27FC236}">
+                <a16:creationId xmlns:a16="http://schemas.microsoft.com/office/drawing/2014/main" id="{13EFC20C-170A-402B-E3E6-E1894D86A017}"/>
+              </a:ext>
+            </a:extLst>
+          </p:cNvPr>
+          <p:cNvSpPr>
+            <a:spLocks noGrp="1"/>
+          </p:cNvSpPr>
+          <p:nvPr>
+            <p:ph type="sldNum" sz="quarter" idx="5"/>
+          </p:nvPr>
+        </p:nvSpPr>
+        <p:spPr/>
+        <p:txBody>
+          <a:bodyPr/>
+          <a:lstStyle/>
+          <a:p>
+            <a:fld id="{FE90CCE9-4AAE-4E1F-85AD-521A406D6524}" type="slidenum">
+              <a:rPr lang="en-PH" smtClean="0"/>
+              <a:t>20</a:t>
+            </a:fld>
+            <a:endParaRPr lang="en-PH"/>
+          </a:p>
+        </p:txBody>
+      </p:sp>
+    </p:spTree>
+    <p:extLst>
+      <p:ext uri="{BB962C8B-B14F-4D97-AF65-F5344CB8AC3E}">
+        <p14:creationId xmlns:p14="http://schemas.microsoft.com/office/powerpoint/2010/main" val="410263396"/>
+      </p:ext>
+    </p:extLst>
+  </p:cSld>
+  <p:clrMapOvr>
+    <a:masterClrMapping/>
+  </p:clrMapOvr>
+</p:notes>
+</file>
+
+<file path=ppt/notesSlides/notesSlide21.xml><?xml version="1.0" encoding="utf-8"?>
+<p:notes xmlns:a="http://schemas.openxmlformats.org/drawingml/2006/main" xmlns:r="http://schemas.openxmlformats.org/officeDocument/2006/relationships" xmlns:p="http://schemas.openxmlformats.org/presentationml/2006/main">
+  <p:cSld>
+    <p:spTree>
+      <p:nvGrpSpPr>
+        <p:cNvPr id="1" name="">
+          <a:extLst>
+            <a:ext uri="{FF2B5EF4-FFF2-40B4-BE49-F238E27FC236}">
               <a16:creationId xmlns:a16="http://schemas.microsoft.com/office/drawing/2014/main" id="{BD876D7B-A424-0E53-8640-699525756421}"/>
             </a:ext>
           </a:extLst>
@@ -1858,7 +1967,7 @@
           <a:p>
             <a:fld id="{FE90CCE9-4AAE-4E1F-85AD-521A406D6524}" type="slidenum">
               <a:rPr lang="en-PH" smtClean="0"/>
-              <a:t>20</a:t>
+              <a:t>21</a:t>
             </a:fld>
             <a:endParaRPr lang="en-PH"/>
           </a:p>
@@ -1877,7 +1986,7 @@
 </p:notes>
 </file>
 
-<file path=ppt/notesSlides/notesSlide21.xml><?xml version="1.0" encoding="utf-8"?>
+<file path=ppt/notesSlides/notesSlide22.xml><?xml version="1.0" encoding="utf-8"?>
 <p:notes xmlns:a="http://schemas.openxmlformats.org/drawingml/2006/main" xmlns:r="http://schemas.openxmlformats.org/officeDocument/2006/relationships" xmlns:p="http://schemas.openxmlformats.org/presentationml/2006/main">
   <p:cSld>
     <p:spTree>
@@ -1966,7 +2075,7 @@
           <a:p>
             <a:fld id="{FE90CCE9-4AAE-4E1F-85AD-521A406D6524}" type="slidenum">
               <a:rPr lang="en-PH" smtClean="0"/>
-              <a:t>21</a:t>
+              <a:t>22</a:t>
             </a:fld>
             <a:endParaRPr lang="en-PH"/>
           </a:p>
@@ -1985,7 +2094,7 @@
 </p:notes>
 </file>
 
-<file path=ppt/notesSlides/notesSlide22.xml><?xml version="1.0" encoding="utf-8"?>
+<file path=ppt/notesSlides/notesSlide23.xml><?xml version="1.0" encoding="utf-8"?>
 <p:notes xmlns:a="http://schemas.openxmlformats.org/drawingml/2006/main" xmlns:r="http://schemas.openxmlformats.org/officeDocument/2006/relationships" xmlns:p="http://schemas.openxmlformats.org/presentationml/2006/main">
   <p:cSld>
     <p:spTree>
@@ -2074,7 +2183,7 @@
           <a:p>
             <a:fld id="{FE90CCE9-4AAE-4E1F-85AD-521A406D6524}" type="slidenum">
               <a:rPr lang="en-PH" smtClean="0"/>
-              <a:t>22</a:t>
+              <a:t>23</a:t>
             </a:fld>
             <a:endParaRPr lang="en-PH"/>
           </a:p>
@@ -2093,7 +2202,7 @@
 </p:notes>
 </file>
 
-<file path=ppt/notesSlides/notesSlide23.xml><?xml version="1.0" encoding="utf-8"?>
+<file path=ppt/notesSlides/notesSlide24.xml><?xml version="1.0" encoding="utf-8"?>
 <p:notes xmlns:a="http://schemas.openxmlformats.org/drawingml/2006/main" xmlns:r="http://schemas.openxmlformats.org/officeDocument/2006/relationships" xmlns:p="http://schemas.openxmlformats.org/presentationml/2006/main">
   <p:cSld>
     <p:spTree>
@@ -2182,7 +2291,7 @@
           <a:p>
             <a:fld id="{FE90CCE9-4AAE-4E1F-85AD-521A406D6524}" type="slidenum">
               <a:rPr lang="en-PH" smtClean="0"/>
-              <a:t>23</a:t>
+              <a:t>24</a:t>
             </a:fld>
             <a:endParaRPr lang="en-PH"/>
           </a:p>
@@ -2201,7 +2310,7 @@
 </p:notes>
 </file>
 
-<file path=ppt/notesSlides/notesSlide24.xml><?xml version="1.0" encoding="utf-8"?>
+<file path=ppt/notesSlides/notesSlide25.xml><?xml version="1.0" encoding="utf-8"?>
 <p:notes xmlns:a="http://schemas.openxmlformats.org/drawingml/2006/main" xmlns:r="http://schemas.openxmlformats.org/officeDocument/2006/relationships" xmlns:p="http://schemas.openxmlformats.org/presentationml/2006/main">
   <p:cSld>
     <p:spTree>
@@ -2290,7 +2399,7 @@
           <a:p>
             <a:fld id="{FE90CCE9-4AAE-4E1F-85AD-521A406D6524}" type="slidenum">
               <a:rPr lang="en-PH" smtClean="0"/>
-              <a:t>24</a:t>
+              <a:t>25</a:t>
             </a:fld>
             <a:endParaRPr lang="en-PH"/>
           </a:p>
@@ -2309,7 +2418,7 @@
 </p:notes>
 </file>
 
-<file path=ppt/notesSlides/notesSlide25.xml><?xml version="1.0" encoding="utf-8"?>
+<file path=ppt/notesSlides/notesSlide26.xml><?xml version="1.0" encoding="utf-8"?>
 <p:notes xmlns:a="http://schemas.openxmlformats.org/drawingml/2006/main" xmlns:r="http://schemas.openxmlformats.org/officeDocument/2006/relationships" xmlns:p="http://schemas.openxmlformats.org/presentationml/2006/main">
   <p:cSld>
     <p:spTree>
@@ -2398,7 +2507,7 @@
           <a:p>
             <a:fld id="{FE90CCE9-4AAE-4E1F-85AD-521A406D6524}" type="slidenum">
               <a:rPr lang="en-PH" smtClean="0"/>
-              <a:t>25</a:t>
+              <a:t>26</a:t>
             </a:fld>
             <a:endParaRPr lang="en-PH"/>
           </a:p>
@@ -9084,15 +9193,7 @@
                   <a:schemeClr val="bg1"/>
                 </a:solidFill>
               </a:rPr>
-              <a:t>Size </a:t>
-            </a:r>
-            <a:r>
-              <a:rPr lang="en-PH" sz="2500" b="1">
-                <a:solidFill>
-                  <a:schemeClr val="bg1"/>
-                </a:solidFill>
-              </a:rPr>
-              <a:t>= 5</a:t>
+              <a:t>Size = 5</a:t>
             </a:r>
             <a:endParaRPr lang="en-US" sz="2500" dirty="0">
               <a:solidFill>
@@ -11180,6 +11281,870 @@
         <p:cNvPr id="1" name="">
           <a:extLst>
             <a:ext uri="{FF2B5EF4-FFF2-40B4-BE49-F238E27FC236}">
+              <a16:creationId xmlns:a16="http://schemas.microsoft.com/office/drawing/2014/main" id="{48F79B82-181C-1EF3-183C-FA00528DE9C9}"/>
+            </a:ext>
+          </a:extLst>
+        </p:cNvPr>
+        <p:cNvGrpSpPr/>
+        <p:nvPr/>
+      </p:nvGrpSpPr>
+      <p:grpSpPr>
+        <a:xfrm>
+          <a:off x="0" y="0"/>
+          <a:ext cx="0" cy="0"/>
+          <a:chOff x="0" y="0"/>
+          <a:chExt cx="0" cy="0"/>
+        </a:xfrm>
+      </p:grpSpPr>
+      <p:sp>
+        <p:nvSpPr>
+          <p:cNvPr id="5" name="Title 1">
+            <a:extLst>
+              <a:ext uri="{FF2B5EF4-FFF2-40B4-BE49-F238E27FC236}">
+                <a16:creationId xmlns:a16="http://schemas.microsoft.com/office/drawing/2014/main" id="{A5590C03-2BEC-3F0F-4F2C-F9A14467380B}"/>
+              </a:ext>
+            </a:extLst>
+          </p:cNvPr>
+          <p:cNvSpPr>
+            <a:spLocks noGrp="1"/>
+          </p:cNvSpPr>
+          <p:nvPr>
+            <p:ph type="ctrTitle"/>
+          </p:nvPr>
+        </p:nvSpPr>
+        <p:spPr>
+          <a:xfrm>
+            <a:off x="1524000" y="497150"/>
+            <a:ext cx="9144000" cy="718459"/>
+          </a:xfrm>
+        </p:spPr>
+        <p:txBody>
+          <a:bodyPr>
+            <a:normAutofit fontScale="90000"/>
+          </a:bodyPr>
+          <a:lstStyle/>
+          <a:p>
+            <a:r>
+              <a:rPr lang="en-US" b="1" dirty="0">
+                <a:solidFill>
+                  <a:srgbClr val="00B050"/>
+                </a:solidFill>
+              </a:rPr>
+              <a:t>Height of a Node</a:t>
+            </a:r>
+            <a:endParaRPr lang="en-PH" dirty="0">
+              <a:solidFill>
+                <a:srgbClr val="00B050"/>
+              </a:solidFill>
+            </a:endParaRPr>
+          </a:p>
+        </p:txBody>
+      </p:sp>
+      <p:sp>
+        <p:nvSpPr>
+          <p:cNvPr id="7" name="Oval 6">
+            <a:extLst>
+              <a:ext uri="{FF2B5EF4-FFF2-40B4-BE49-F238E27FC236}">
+                <a16:creationId xmlns:a16="http://schemas.microsoft.com/office/drawing/2014/main" id="{EC9A484B-4FEA-DA04-BC28-E60957A3286F}"/>
+              </a:ext>
+            </a:extLst>
+          </p:cNvPr>
+          <p:cNvSpPr/>
+          <p:nvPr/>
+        </p:nvSpPr>
+        <p:spPr>
+          <a:xfrm>
+            <a:off x="5614586" y="1636729"/>
+            <a:ext cx="720000" cy="720000"/>
+          </a:xfrm>
+          <a:prstGeom prst="ellipse">
+            <a:avLst/>
+          </a:prstGeom>
+          <a:solidFill>
+            <a:srgbClr val="6AB5FF"/>
+          </a:solidFill>
+        </p:spPr>
+        <p:style>
+          <a:lnRef idx="2">
+            <a:schemeClr val="accent1">
+              <a:shade val="15000"/>
+            </a:schemeClr>
+          </a:lnRef>
+          <a:fillRef idx="1">
+            <a:schemeClr val="accent1"/>
+          </a:fillRef>
+          <a:effectRef idx="0">
+            <a:schemeClr val="accent1"/>
+          </a:effectRef>
+          <a:fontRef idx="minor">
+            <a:schemeClr val="lt1"/>
+          </a:fontRef>
+        </p:style>
+        <p:txBody>
+          <a:bodyPr rtlCol="0" anchor="ctr"/>
+          <a:lstStyle/>
+          <a:p>
+            <a:pPr algn="ctr"/>
+            <a:r>
+              <a:rPr lang="en-US" sz="4000" b="1" dirty="0"/>
+              <a:t>1</a:t>
+            </a:r>
+          </a:p>
+        </p:txBody>
+      </p:sp>
+      <p:sp>
+        <p:nvSpPr>
+          <p:cNvPr id="8" name="Oval 7">
+            <a:extLst>
+              <a:ext uri="{FF2B5EF4-FFF2-40B4-BE49-F238E27FC236}">
+                <a16:creationId xmlns:a16="http://schemas.microsoft.com/office/drawing/2014/main" id="{9EB0206D-9B54-C4F9-73BC-BF814CB43EBB}"/>
+              </a:ext>
+            </a:extLst>
+          </p:cNvPr>
+          <p:cNvSpPr/>
+          <p:nvPr/>
+        </p:nvSpPr>
+        <p:spPr>
+          <a:xfrm>
+            <a:off x="4647487" y="2722276"/>
+            <a:ext cx="720000" cy="720000"/>
+          </a:xfrm>
+          <a:prstGeom prst="ellipse">
+            <a:avLst/>
+          </a:prstGeom>
+          <a:solidFill>
+            <a:srgbClr val="6AB5FF"/>
+          </a:solidFill>
+        </p:spPr>
+        <p:style>
+          <a:lnRef idx="2">
+            <a:schemeClr val="accent1">
+              <a:shade val="15000"/>
+            </a:schemeClr>
+          </a:lnRef>
+          <a:fillRef idx="1">
+            <a:schemeClr val="accent1"/>
+          </a:fillRef>
+          <a:effectRef idx="0">
+            <a:schemeClr val="accent1"/>
+          </a:effectRef>
+          <a:fontRef idx="minor">
+            <a:schemeClr val="lt1"/>
+          </a:fontRef>
+        </p:style>
+        <p:txBody>
+          <a:bodyPr rtlCol="0" anchor="ctr"/>
+          <a:lstStyle/>
+          <a:p>
+            <a:pPr algn="ctr"/>
+            <a:r>
+              <a:rPr lang="en-US" sz="4000" b="1" dirty="0"/>
+              <a:t>2</a:t>
+            </a:r>
+          </a:p>
+        </p:txBody>
+      </p:sp>
+      <p:cxnSp>
+        <p:nvCxnSpPr>
+          <p:cNvPr id="9" name="Straight Connector 8">
+            <a:extLst>
+              <a:ext uri="{FF2B5EF4-FFF2-40B4-BE49-F238E27FC236}">
+                <a16:creationId xmlns:a16="http://schemas.microsoft.com/office/drawing/2014/main" id="{677B4E40-E062-2CAA-75B0-961DB7E797EB}"/>
+              </a:ext>
+            </a:extLst>
+          </p:cNvPr>
+          <p:cNvCxnSpPr>
+            <a:cxnSpLocks/>
+            <a:stCxn id="8" idx="7"/>
+            <a:endCxn id="7" idx="3"/>
+          </p:cNvCxnSpPr>
+          <p:nvPr/>
+        </p:nvCxnSpPr>
+        <p:spPr>
+          <a:xfrm flipV="1">
+            <a:off x="5262045" y="2251287"/>
+            <a:ext cx="457983" cy="576431"/>
+          </a:xfrm>
+          <a:prstGeom prst="line">
+            <a:avLst/>
+          </a:prstGeom>
+          <a:ln w="38100">
+            <a:solidFill>
+              <a:srgbClr val="AAAAAA"/>
+            </a:solidFill>
+          </a:ln>
+        </p:spPr>
+        <p:style>
+          <a:lnRef idx="1">
+            <a:schemeClr val="accent1"/>
+          </a:lnRef>
+          <a:fillRef idx="0">
+            <a:schemeClr val="accent1"/>
+          </a:fillRef>
+          <a:effectRef idx="0">
+            <a:schemeClr val="accent1"/>
+          </a:effectRef>
+          <a:fontRef idx="minor">
+            <a:schemeClr val="tx1"/>
+          </a:fontRef>
+        </p:style>
+      </p:cxnSp>
+      <p:sp>
+        <p:nvSpPr>
+          <p:cNvPr id="11" name="Oval 10">
+            <a:extLst>
+              <a:ext uri="{FF2B5EF4-FFF2-40B4-BE49-F238E27FC236}">
+                <a16:creationId xmlns:a16="http://schemas.microsoft.com/office/drawing/2014/main" id="{4C287C7B-A524-9DB4-2BAB-EC8CF9923665}"/>
+              </a:ext>
+            </a:extLst>
+          </p:cNvPr>
+          <p:cNvSpPr/>
+          <p:nvPr/>
+        </p:nvSpPr>
+        <p:spPr>
+          <a:xfrm>
+            <a:off x="3771073" y="3761099"/>
+            <a:ext cx="720000" cy="720000"/>
+          </a:xfrm>
+          <a:prstGeom prst="ellipse">
+            <a:avLst/>
+          </a:prstGeom>
+          <a:solidFill>
+            <a:srgbClr val="6AB5FF"/>
+          </a:solidFill>
+        </p:spPr>
+        <p:style>
+          <a:lnRef idx="2">
+            <a:schemeClr val="accent1">
+              <a:shade val="15000"/>
+            </a:schemeClr>
+          </a:lnRef>
+          <a:fillRef idx="1">
+            <a:schemeClr val="accent1"/>
+          </a:fillRef>
+          <a:effectRef idx="0">
+            <a:schemeClr val="accent1"/>
+          </a:effectRef>
+          <a:fontRef idx="minor">
+            <a:schemeClr val="lt1"/>
+          </a:fontRef>
+        </p:style>
+        <p:txBody>
+          <a:bodyPr rtlCol="0" anchor="ctr"/>
+          <a:lstStyle/>
+          <a:p>
+            <a:pPr algn="ctr"/>
+            <a:r>
+              <a:rPr lang="en-US" sz="4000" b="1" dirty="0"/>
+              <a:t>4</a:t>
+            </a:r>
+          </a:p>
+        </p:txBody>
+      </p:sp>
+      <p:cxnSp>
+        <p:nvCxnSpPr>
+          <p:cNvPr id="13" name="Straight Connector 12">
+            <a:extLst>
+              <a:ext uri="{FF2B5EF4-FFF2-40B4-BE49-F238E27FC236}">
+                <a16:creationId xmlns:a16="http://schemas.microsoft.com/office/drawing/2014/main" id="{BEA934A6-9486-3851-5BE8-A98A1BE83C3D}"/>
+              </a:ext>
+            </a:extLst>
+          </p:cNvPr>
+          <p:cNvCxnSpPr>
+            <a:cxnSpLocks/>
+            <a:stCxn id="11" idx="7"/>
+            <a:endCxn id="8" idx="3"/>
+          </p:cNvCxnSpPr>
+          <p:nvPr/>
+        </p:nvCxnSpPr>
+        <p:spPr>
+          <a:xfrm flipV="1">
+            <a:off x="4385631" y="3336834"/>
+            <a:ext cx="367298" cy="529707"/>
+          </a:xfrm>
+          <a:prstGeom prst="line">
+            <a:avLst/>
+          </a:prstGeom>
+          <a:ln w="38100">
+            <a:solidFill>
+              <a:srgbClr val="AAAAAA"/>
+            </a:solidFill>
+          </a:ln>
+        </p:spPr>
+        <p:style>
+          <a:lnRef idx="1">
+            <a:schemeClr val="accent1"/>
+          </a:lnRef>
+          <a:fillRef idx="0">
+            <a:schemeClr val="accent1"/>
+          </a:fillRef>
+          <a:effectRef idx="0">
+            <a:schemeClr val="accent1"/>
+          </a:effectRef>
+          <a:fontRef idx="minor">
+            <a:schemeClr val="tx1"/>
+          </a:fontRef>
+        </p:style>
+      </p:cxnSp>
+      <p:sp>
+        <p:nvSpPr>
+          <p:cNvPr id="15" name="Oval 14">
+            <a:extLst>
+              <a:ext uri="{FF2B5EF4-FFF2-40B4-BE49-F238E27FC236}">
+                <a16:creationId xmlns:a16="http://schemas.microsoft.com/office/drawing/2014/main" id="{0FF52860-F9D0-3768-EBC1-19D797D5FF6B}"/>
+              </a:ext>
+            </a:extLst>
+          </p:cNvPr>
+          <p:cNvSpPr/>
+          <p:nvPr/>
+        </p:nvSpPr>
+        <p:spPr>
+          <a:xfrm>
+            <a:off x="6497954" y="2722276"/>
+            <a:ext cx="720000" cy="720000"/>
+          </a:xfrm>
+          <a:prstGeom prst="ellipse">
+            <a:avLst/>
+          </a:prstGeom>
+          <a:solidFill>
+            <a:srgbClr val="6AB5FF"/>
+          </a:solidFill>
+        </p:spPr>
+        <p:style>
+          <a:lnRef idx="2">
+            <a:schemeClr val="accent1">
+              <a:shade val="15000"/>
+            </a:schemeClr>
+          </a:lnRef>
+          <a:fillRef idx="1">
+            <a:schemeClr val="accent1"/>
+          </a:fillRef>
+          <a:effectRef idx="0">
+            <a:schemeClr val="accent1"/>
+          </a:effectRef>
+          <a:fontRef idx="minor">
+            <a:schemeClr val="lt1"/>
+          </a:fontRef>
+        </p:style>
+        <p:txBody>
+          <a:bodyPr rtlCol="0" anchor="ctr"/>
+          <a:lstStyle/>
+          <a:p>
+            <a:pPr algn="ctr"/>
+            <a:r>
+              <a:rPr lang="en-US" sz="4000" b="1" dirty="0"/>
+              <a:t>3</a:t>
+            </a:r>
+          </a:p>
+        </p:txBody>
+      </p:sp>
+      <p:cxnSp>
+        <p:nvCxnSpPr>
+          <p:cNvPr id="17" name="Straight Connector 16">
+            <a:extLst>
+              <a:ext uri="{FF2B5EF4-FFF2-40B4-BE49-F238E27FC236}">
+                <a16:creationId xmlns:a16="http://schemas.microsoft.com/office/drawing/2014/main" id="{1C0ACC60-F00F-8BA1-BCAB-8F8B36C3CDD9}"/>
+              </a:ext>
+            </a:extLst>
+          </p:cNvPr>
+          <p:cNvCxnSpPr>
+            <a:cxnSpLocks/>
+            <a:stCxn id="15" idx="1"/>
+            <a:endCxn id="7" idx="5"/>
+          </p:cNvCxnSpPr>
+          <p:nvPr/>
+        </p:nvCxnSpPr>
+        <p:spPr>
+          <a:xfrm flipH="1" flipV="1">
+            <a:off x="6229144" y="2251287"/>
+            <a:ext cx="374252" cy="576431"/>
+          </a:xfrm>
+          <a:prstGeom prst="line">
+            <a:avLst/>
+          </a:prstGeom>
+          <a:ln w="38100">
+            <a:solidFill>
+              <a:srgbClr val="AAAAAA"/>
+            </a:solidFill>
+          </a:ln>
+        </p:spPr>
+        <p:style>
+          <a:lnRef idx="1">
+            <a:schemeClr val="accent1"/>
+          </a:lnRef>
+          <a:fillRef idx="0">
+            <a:schemeClr val="accent1"/>
+          </a:fillRef>
+          <a:effectRef idx="0">
+            <a:schemeClr val="accent1"/>
+          </a:effectRef>
+          <a:fontRef idx="minor">
+            <a:schemeClr val="tx1"/>
+          </a:fontRef>
+        </p:style>
+      </p:cxnSp>
+      <p:sp>
+        <p:nvSpPr>
+          <p:cNvPr id="18" name="Oval 17">
+            <a:extLst>
+              <a:ext uri="{FF2B5EF4-FFF2-40B4-BE49-F238E27FC236}">
+                <a16:creationId xmlns:a16="http://schemas.microsoft.com/office/drawing/2014/main" id="{98971656-66E6-1B09-BD11-7BF19E7DD713}"/>
+              </a:ext>
+            </a:extLst>
+          </p:cNvPr>
+          <p:cNvSpPr/>
+          <p:nvPr/>
+        </p:nvSpPr>
+        <p:spPr>
+          <a:xfrm>
+            <a:off x="5621540" y="3761099"/>
+            <a:ext cx="720000" cy="720000"/>
+          </a:xfrm>
+          <a:prstGeom prst="ellipse">
+            <a:avLst/>
+          </a:prstGeom>
+          <a:solidFill>
+            <a:srgbClr val="6AB5FF"/>
+          </a:solidFill>
+        </p:spPr>
+        <p:style>
+          <a:lnRef idx="2">
+            <a:schemeClr val="accent1">
+              <a:shade val="15000"/>
+            </a:schemeClr>
+          </a:lnRef>
+          <a:fillRef idx="1">
+            <a:schemeClr val="accent1"/>
+          </a:fillRef>
+          <a:effectRef idx="0">
+            <a:schemeClr val="accent1"/>
+          </a:effectRef>
+          <a:fontRef idx="minor">
+            <a:schemeClr val="lt1"/>
+          </a:fontRef>
+        </p:style>
+        <p:txBody>
+          <a:bodyPr rtlCol="0" anchor="ctr"/>
+          <a:lstStyle/>
+          <a:p>
+            <a:pPr algn="ctr"/>
+            <a:r>
+              <a:rPr lang="en-US" sz="4000" b="1" dirty="0"/>
+              <a:t>5</a:t>
+            </a:r>
+          </a:p>
+        </p:txBody>
+      </p:sp>
+      <p:cxnSp>
+        <p:nvCxnSpPr>
+          <p:cNvPr id="19" name="Straight Connector 18">
+            <a:extLst>
+              <a:ext uri="{FF2B5EF4-FFF2-40B4-BE49-F238E27FC236}">
+                <a16:creationId xmlns:a16="http://schemas.microsoft.com/office/drawing/2014/main" id="{5DF88013-D4D7-6DFC-E3F4-29907ECFCF9E}"/>
+              </a:ext>
+            </a:extLst>
+          </p:cNvPr>
+          <p:cNvCxnSpPr>
+            <a:cxnSpLocks/>
+            <a:stCxn id="18" idx="1"/>
+            <a:endCxn id="8" idx="5"/>
+          </p:cNvCxnSpPr>
+          <p:nvPr/>
+        </p:nvCxnSpPr>
+        <p:spPr>
+          <a:xfrm flipH="1" flipV="1">
+            <a:off x="5262045" y="3336834"/>
+            <a:ext cx="464937" cy="529707"/>
+          </a:xfrm>
+          <a:prstGeom prst="line">
+            <a:avLst/>
+          </a:prstGeom>
+          <a:ln w="38100">
+            <a:solidFill>
+              <a:srgbClr val="AAAAAA"/>
+            </a:solidFill>
+          </a:ln>
+        </p:spPr>
+        <p:style>
+          <a:lnRef idx="1">
+            <a:schemeClr val="accent1"/>
+          </a:lnRef>
+          <a:fillRef idx="0">
+            <a:schemeClr val="accent1"/>
+          </a:fillRef>
+          <a:effectRef idx="0">
+            <a:schemeClr val="accent1"/>
+          </a:effectRef>
+          <a:fontRef idx="minor">
+            <a:schemeClr val="tx1"/>
+          </a:fontRef>
+        </p:style>
+      </p:cxnSp>
+      <p:sp>
+        <p:nvSpPr>
+          <p:cNvPr id="6" name="TextBox 5">
+            <a:extLst>
+              <a:ext uri="{FF2B5EF4-FFF2-40B4-BE49-F238E27FC236}">
+                <a16:creationId xmlns:a16="http://schemas.microsoft.com/office/drawing/2014/main" id="{6883CB2D-D849-A0D7-4FBF-9F098EA65ABD}"/>
+              </a:ext>
+            </a:extLst>
+          </p:cNvPr>
+          <p:cNvSpPr txBox="1"/>
+          <p:nvPr/>
+        </p:nvSpPr>
+        <p:spPr>
+          <a:xfrm>
+            <a:off x="6687127" y="1730415"/>
+            <a:ext cx="3270807" cy="477054"/>
+          </a:xfrm>
+          <a:prstGeom prst="rect">
+            <a:avLst/>
+          </a:prstGeom>
+          <a:noFill/>
+        </p:spPr>
+        <p:txBody>
+          <a:bodyPr wrap="square">
+            <a:spAutoFit/>
+          </a:bodyPr>
+          <a:lstStyle/>
+          <a:p>
+            <a:pPr algn="ctr"/>
+            <a:r>
+              <a:rPr lang="en-PH" sz="2500" b="1" dirty="0">
+                <a:solidFill>
+                  <a:schemeClr val="bg1"/>
+                </a:solidFill>
+              </a:rPr>
+              <a:t>Height of Node 6 is 1</a:t>
+            </a:r>
+            <a:endParaRPr lang="en-US" sz="2500" dirty="0">
+              <a:solidFill>
+                <a:schemeClr val="bg1"/>
+              </a:solidFill>
+            </a:endParaRPr>
+          </a:p>
+        </p:txBody>
+      </p:sp>
+      <p:sp>
+        <p:nvSpPr>
+          <p:cNvPr id="2" name="Oval 1">
+            <a:extLst>
+              <a:ext uri="{FF2B5EF4-FFF2-40B4-BE49-F238E27FC236}">
+                <a16:creationId xmlns:a16="http://schemas.microsoft.com/office/drawing/2014/main" id="{8E04864B-C75A-83CF-8378-4C2CFC8667D1}"/>
+              </a:ext>
+            </a:extLst>
+          </p:cNvPr>
+          <p:cNvSpPr/>
+          <p:nvPr/>
+        </p:nvSpPr>
+        <p:spPr>
+          <a:xfrm>
+            <a:off x="7472007" y="3761099"/>
+            <a:ext cx="720000" cy="720000"/>
+          </a:xfrm>
+          <a:prstGeom prst="ellipse">
+            <a:avLst/>
+          </a:prstGeom>
+          <a:solidFill>
+            <a:srgbClr val="6AB5FF"/>
+          </a:solidFill>
+        </p:spPr>
+        <p:style>
+          <a:lnRef idx="2">
+            <a:schemeClr val="accent1">
+              <a:shade val="15000"/>
+            </a:schemeClr>
+          </a:lnRef>
+          <a:fillRef idx="1">
+            <a:schemeClr val="accent1"/>
+          </a:fillRef>
+          <a:effectRef idx="0">
+            <a:schemeClr val="accent1"/>
+          </a:effectRef>
+          <a:fontRef idx="minor">
+            <a:schemeClr val="lt1"/>
+          </a:fontRef>
+        </p:style>
+        <p:txBody>
+          <a:bodyPr rtlCol="0" anchor="ctr"/>
+          <a:lstStyle/>
+          <a:p>
+            <a:pPr algn="ctr"/>
+            <a:r>
+              <a:rPr lang="en-US" sz="4000" b="1" dirty="0"/>
+              <a:t>6</a:t>
+            </a:r>
+          </a:p>
+        </p:txBody>
+      </p:sp>
+      <p:cxnSp>
+        <p:nvCxnSpPr>
+          <p:cNvPr id="3" name="Straight Connector 2">
+            <a:extLst>
+              <a:ext uri="{FF2B5EF4-FFF2-40B4-BE49-F238E27FC236}">
+                <a16:creationId xmlns:a16="http://schemas.microsoft.com/office/drawing/2014/main" id="{D7CE8871-6AAA-2869-835A-DB8FFB127BA7}"/>
+              </a:ext>
+            </a:extLst>
+          </p:cNvPr>
+          <p:cNvCxnSpPr>
+            <a:cxnSpLocks/>
+            <a:stCxn id="2" idx="1"/>
+            <a:endCxn id="15" idx="5"/>
+          </p:cNvCxnSpPr>
+          <p:nvPr/>
+        </p:nvCxnSpPr>
+        <p:spPr>
+          <a:xfrm flipH="1" flipV="1">
+            <a:off x="7112512" y="3336834"/>
+            <a:ext cx="464937" cy="529707"/>
+          </a:xfrm>
+          <a:prstGeom prst="line">
+            <a:avLst/>
+          </a:prstGeom>
+          <a:ln w="38100">
+            <a:solidFill>
+              <a:srgbClr val="AAAAAA"/>
+            </a:solidFill>
+          </a:ln>
+        </p:spPr>
+        <p:style>
+          <a:lnRef idx="1">
+            <a:schemeClr val="accent1"/>
+          </a:lnRef>
+          <a:fillRef idx="0">
+            <a:schemeClr val="accent1"/>
+          </a:fillRef>
+          <a:effectRef idx="0">
+            <a:schemeClr val="accent1"/>
+          </a:effectRef>
+          <a:fontRef idx="minor">
+            <a:schemeClr val="tx1"/>
+          </a:fontRef>
+        </p:style>
+      </p:cxnSp>
+      <p:sp>
+        <p:nvSpPr>
+          <p:cNvPr id="16" name="Oval 15">
+            <a:extLst>
+              <a:ext uri="{FF2B5EF4-FFF2-40B4-BE49-F238E27FC236}">
+                <a16:creationId xmlns:a16="http://schemas.microsoft.com/office/drawing/2014/main" id="{010DE7C8-20FE-5ECB-2557-2E17AF054E76}"/>
+              </a:ext>
+            </a:extLst>
+          </p:cNvPr>
+          <p:cNvSpPr/>
+          <p:nvPr/>
+        </p:nvSpPr>
+        <p:spPr>
+          <a:xfrm>
+            <a:off x="8443121" y="4751539"/>
+            <a:ext cx="720000" cy="720000"/>
+          </a:xfrm>
+          <a:prstGeom prst="ellipse">
+            <a:avLst/>
+          </a:prstGeom>
+          <a:solidFill>
+            <a:srgbClr val="6AB5FF"/>
+          </a:solidFill>
+        </p:spPr>
+        <p:style>
+          <a:lnRef idx="2">
+            <a:schemeClr val="accent1">
+              <a:shade val="15000"/>
+            </a:schemeClr>
+          </a:lnRef>
+          <a:fillRef idx="1">
+            <a:schemeClr val="accent1"/>
+          </a:fillRef>
+          <a:effectRef idx="0">
+            <a:schemeClr val="accent1"/>
+          </a:effectRef>
+          <a:fontRef idx="minor">
+            <a:schemeClr val="lt1"/>
+          </a:fontRef>
+        </p:style>
+        <p:txBody>
+          <a:bodyPr rtlCol="0" anchor="ctr"/>
+          <a:lstStyle/>
+          <a:p>
+            <a:pPr algn="ctr"/>
+            <a:r>
+              <a:rPr lang="en-US" sz="4000" b="1" dirty="0"/>
+              <a:t>7</a:t>
+            </a:r>
+          </a:p>
+        </p:txBody>
+      </p:sp>
+      <p:cxnSp>
+        <p:nvCxnSpPr>
+          <p:cNvPr id="20" name="Straight Connector 19">
+            <a:extLst>
+              <a:ext uri="{FF2B5EF4-FFF2-40B4-BE49-F238E27FC236}">
+                <a16:creationId xmlns:a16="http://schemas.microsoft.com/office/drawing/2014/main" id="{B0281427-0793-8211-319A-BC1E5BF43089}"/>
+              </a:ext>
+            </a:extLst>
+          </p:cNvPr>
+          <p:cNvCxnSpPr>
+            <a:cxnSpLocks/>
+            <a:stCxn id="16" idx="1"/>
+            <a:endCxn id="2" idx="5"/>
+          </p:cNvCxnSpPr>
+          <p:nvPr/>
+        </p:nvCxnSpPr>
+        <p:spPr>
+          <a:xfrm flipH="1" flipV="1">
+            <a:off x="8086565" y="4375657"/>
+            <a:ext cx="461998" cy="481324"/>
+          </a:xfrm>
+          <a:prstGeom prst="line">
+            <a:avLst/>
+          </a:prstGeom>
+          <a:ln w="38100">
+            <a:solidFill>
+              <a:srgbClr val="AAAAAA"/>
+            </a:solidFill>
+          </a:ln>
+        </p:spPr>
+        <p:style>
+          <a:lnRef idx="1">
+            <a:schemeClr val="accent1"/>
+          </a:lnRef>
+          <a:fillRef idx="0">
+            <a:schemeClr val="accent1"/>
+          </a:fillRef>
+          <a:effectRef idx="0">
+            <a:schemeClr val="accent1"/>
+          </a:effectRef>
+          <a:fontRef idx="minor">
+            <a:schemeClr val="tx1"/>
+          </a:fontRef>
+        </p:style>
+      </p:cxnSp>
+      <p:sp>
+        <p:nvSpPr>
+          <p:cNvPr id="25" name="Oval 24">
+            <a:extLst>
+              <a:ext uri="{FF2B5EF4-FFF2-40B4-BE49-F238E27FC236}">
+                <a16:creationId xmlns:a16="http://schemas.microsoft.com/office/drawing/2014/main" id="{9838E325-BBE6-5286-4F2A-43A775BD3674}"/>
+              </a:ext>
+            </a:extLst>
+          </p:cNvPr>
+          <p:cNvSpPr/>
+          <p:nvPr/>
+        </p:nvSpPr>
+        <p:spPr>
+          <a:xfrm>
+            <a:off x="2797066" y="4751539"/>
+            <a:ext cx="720000" cy="720000"/>
+          </a:xfrm>
+          <a:prstGeom prst="ellipse">
+            <a:avLst/>
+          </a:prstGeom>
+          <a:solidFill>
+            <a:srgbClr val="6AB5FF"/>
+          </a:solidFill>
+        </p:spPr>
+        <p:style>
+          <a:lnRef idx="2">
+            <a:schemeClr val="accent1">
+              <a:shade val="15000"/>
+            </a:schemeClr>
+          </a:lnRef>
+          <a:fillRef idx="1">
+            <a:schemeClr val="accent1"/>
+          </a:fillRef>
+          <a:effectRef idx="0">
+            <a:schemeClr val="accent1"/>
+          </a:effectRef>
+          <a:fontRef idx="minor">
+            <a:schemeClr val="lt1"/>
+          </a:fontRef>
+        </p:style>
+        <p:txBody>
+          <a:bodyPr rtlCol="0" anchor="ctr"/>
+          <a:lstStyle/>
+          <a:p>
+            <a:pPr algn="ctr"/>
+            <a:r>
+              <a:rPr lang="en-US" sz="4000" b="1" dirty="0"/>
+              <a:t>8</a:t>
+            </a:r>
+          </a:p>
+        </p:txBody>
+      </p:sp>
+      <p:cxnSp>
+        <p:nvCxnSpPr>
+          <p:cNvPr id="26" name="Straight Connector 25">
+            <a:extLst>
+              <a:ext uri="{FF2B5EF4-FFF2-40B4-BE49-F238E27FC236}">
+                <a16:creationId xmlns:a16="http://schemas.microsoft.com/office/drawing/2014/main" id="{265CE92B-B705-A39F-E97B-BA416A66DB49}"/>
+              </a:ext>
+            </a:extLst>
+          </p:cNvPr>
+          <p:cNvCxnSpPr>
+            <a:cxnSpLocks/>
+            <a:stCxn id="11" idx="3"/>
+            <a:endCxn id="25" idx="7"/>
+          </p:cNvCxnSpPr>
+          <p:nvPr/>
+        </p:nvCxnSpPr>
+        <p:spPr>
+          <a:xfrm flipH="1">
+            <a:off x="3411624" y="4375657"/>
+            <a:ext cx="464891" cy="481324"/>
+          </a:xfrm>
+          <a:prstGeom prst="line">
+            <a:avLst/>
+          </a:prstGeom>
+          <a:ln w="38100">
+            <a:solidFill>
+              <a:srgbClr val="AAAAAA"/>
+            </a:solidFill>
+          </a:ln>
+        </p:spPr>
+        <p:style>
+          <a:lnRef idx="1">
+            <a:schemeClr val="accent1"/>
+          </a:lnRef>
+          <a:fillRef idx="0">
+            <a:schemeClr val="accent1"/>
+          </a:fillRef>
+          <a:effectRef idx="0">
+            <a:schemeClr val="accent1"/>
+          </a:effectRef>
+          <a:fontRef idx="minor">
+            <a:schemeClr val="tx1"/>
+          </a:fontRef>
+        </p:style>
+      </p:cxnSp>
+    </p:spTree>
+    <p:extLst>
+      <p:ext uri="{BB962C8B-B14F-4D97-AF65-F5344CB8AC3E}">
+        <p14:creationId xmlns:p14="http://schemas.microsoft.com/office/powerpoint/2010/main" val="106643712"/>
+      </p:ext>
+    </p:extLst>
+  </p:cSld>
+  <p:clrMapOvr>
+    <a:masterClrMapping/>
+  </p:clrMapOvr>
+</p:sld>
+</file>
+
+<file path=ppt/slides/slide18.xml><?xml version="1.0" encoding="utf-8"?>
+<p:sld xmlns:a="http://schemas.openxmlformats.org/drawingml/2006/main" xmlns:r="http://schemas.openxmlformats.org/officeDocument/2006/relationships" xmlns:p="http://schemas.openxmlformats.org/presentationml/2006/main">
+  <p:cSld>
+    <p:bg>
+      <p:bgPr>
+        <a:solidFill>
+          <a:schemeClr val="tx1"/>
+        </a:solidFill>
+        <a:effectLst/>
+      </p:bgPr>
+    </p:bg>
+    <p:spTree>
+      <p:nvGrpSpPr>
+        <p:cNvPr id="1" name="">
+          <a:extLst>
+            <a:ext uri="{FF2B5EF4-FFF2-40B4-BE49-F238E27FC236}">
               <a16:creationId xmlns:a16="http://schemas.microsoft.com/office/drawing/2014/main" id="{D4E61ABC-BF2E-711F-C93A-EADA89CA2F54}"/>
             </a:ext>
           </a:extLst>
@@ -11822,7 +12787,7 @@
 </p:sld>
 </file>
 
-<file path=ppt/slides/slide18.xml><?xml version="1.0" encoding="utf-8"?>
+<file path=ppt/slides/slide19.xml><?xml version="1.0" encoding="utf-8"?>
 <p:sld xmlns:a="http://schemas.openxmlformats.org/drawingml/2006/main" xmlns:r="http://schemas.openxmlformats.org/officeDocument/2006/relationships" xmlns:p="http://schemas.openxmlformats.org/presentationml/2006/main">
   <p:cSld>
     <p:bg>
@@ -12516,799 +13481,6 @@
     <p:extLst>
       <p:ext uri="{BB962C8B-B14F-4D97-AF65-F5344CB8AC3E}">
         <p14:creationId xmlns:p14="http://schemas.microsoft.com/office/powerpoint/2010/main" val="2456708974"/>
-      </p:ext>
-    </p:extLst>
-  </p:cSld>
-  <p:clrMapOvr>
-    <a:masterClrMapping/>
-  </p:clrMapOvr>
-</p:sld>
-</file>
-
-<file path=ppt/slides/slide19.xml><?xml version="1.0" encoding="utf-8"?>
-<p:sld xmlns:a="http://schemas.openxmlformats.org/drawingml/2006/main" xmlns:r="http://schemas.openxmlformats.org/officeDocument/2006/relationships" xmlns:p="http://schemas.openxmlformats.org/presentationml/2006/main">
-  <p:cSld>
-    <p:bg>
-      <p:bgPr>
-        <a:solidFill>
-          <a:schemeClr val="tx1"/>
-        </a:solidFill>
-        <a:effectLst/>
-      </p:bgPr>
-    </p:bg>
-    <p:spTree>
-      <p:nvGrpSpPr>
-        <p:cNvPr id="1" name="">
-          <a:extLst>
-            <a:ext uri="{FF2B5EF4-FFF2-40B4-BE49-F238E27FC236}">
-              <a16:creationId xmlns:a16="http://schemas.microsoft.com/office/drawing/2014/main" id="{DE7793A5-39FB-5E52-0E96-43D8F317EBEB}"/>
-            </a:ext>
-          </a:extLst>
-        </p:cNvPr>
-        <p:cNvGrpSpPr/>
-        <p:nvPr/>
-      </p:nvGrpSpPr>
-      <p:grpSpPr>
-        <a:xfrm>
-          <a:off x="0" y="0"/>
-          <a:ext cx="0" cy="0"/>
-          <a:chOff x="0" y="0"/>
-          <a:chExt cx="0" cy="0"/>
-        </a:xfrm>
-      </p:grpSpPr>
-      <p:sp>
-        <p:nvSpPr>
-          <p:cNvPr id="5" name="Title 1">
-            <a:extLst>
-              <a:ext uri="{FF2B5EF4-FFF2-40B4-BE49-F238E27FC236}">
-                <a16:creationId xmlns:a16="http://schemas.microsoft.com/office/drawing/2014/main" id="{2BBD32CE-BC2F-E8FD-02E1-885A023D7B65}"/>
-              </a:ext>
-            </a:extLst>
-          </p:cNvPr>
-          <p:cNvSpPr>
-            <a:spLocks noGrp="1"/>
-          </p:cNvSpPr>
-          <p:nvPr>
-            <p:ph type="ctrTitle"/>
-          </p:nvPr>
-        </p:nvSpPr>
-        <p:spPr>
-          <a:xfrm>
-            <a:off x="1524000" y="497150"/>
-            <a:ext cx="9144000" cy="718459"/>
-          </a:xfrm>
-        </p:spPr>
-        <p:txBody>
-          <a:bodyPr>
-            <a:normAutofit fontScale="90000"/>
-          </a:bodyPr>
-          <a:lstStyle/>
-          <a:p>
-            <a:r>
-              <a:rPr lang="en-US" b="1" dirty="0">
-                <a:solidFill>
-                  <a:srgbClr val="00B050"/>
-                </a:solidFill>
-              </a:rPr>
-              <a:t>Height of a Node</a:t>
-            </a:r>
-            <a:endParaRPr lang="en-PH" dirty="0">
-              <a:solidFill>
-                <a:srgbClr val="00B050"/>
-              </a:solidFill>
-            </a:endParaRPr>
-          </a:p>
-        </p:txBody>
-      </p:sp>
-      <p:sp>
-        <p:nvSpPr>
-          <p:cNvPr id="4" name="TextBox 3">
-            <a:extLst>
-              <a:ext uri="{FF2B5EF4-FFF2-40B4-BE49-F238E27FC236}">
-                <a16:creationId xmlns:a16="http://schemas.microsoft.com/office/drawing/2014/main" id="{5B8A71E4-F989-5857-DC8C-2F9DF1B93C4C}"/>
-              </a:ext>
-            </a:extLst>
-          </p:cNvPr>
-          <p:cNvSpPr txBox="1"/>
-          <p:nvPr/>
-        </p:nvSpPr>
-        <p:spPr>
-          <a:xfrm>
-            <a:off x="609600" y="5469819"/>
-            <a:ext cx="10972800" cy="477054"/>
-          </a:xfrm>
-          <a:prstGeom prst="rect">
-            <a:avLst/>
-          </a:prstGeom>
-          <a:noFill/>
-        </p:spPr>
-        <p:txBody>
-          <a:bodyPr wrap="square">
-            <a:spAutoFit/>
-          </a:bodyPr>
-          <a:lstStyle/>
-          <a:p>
-            <a:pPr algn="ctr"/>
-            <a:r>
-              <a:rPr lang="en-US" sz="2500" dirty="0">
-                <a:solidFill>
-                  <a:schemeClr val="bg1"/>
-                </a:solidFill>
-              </a:rPr>
-              <a:t>Because both nodes 4 and 5 are leaf nodes, their height is zero</a:t>
-            </a:r>
-          </a:p>
-        </p:txBody>
-      </p:sp>
-      <p:sp>
-        <p:nvSpPr>
-          <p:cNvPr id="7" name="Oval 6">
-            <a:extLst>
-              <a:ext uri="{FF2B5EF4-FFF2-40B4-BE49-F238E27FC236}">
-                <a16:creationId xmlns:a16="http://schemas.microsoft.com/office/drawing/2014/main" id="{CD8E64CF-2FDF-BD2E-6B7A-2238FB4EBB29}"/>
-              </a:ext>
-            </a:extLst>
-          </p:cNvPr>
-          <p:cNvSpPr/>
-          <p:nvPr/>
-        </p:nvSpPr>
-        <p:spPr>
-          <a:xfrm>
-            <a:off x="5614586" y="1636729"/>
-            <a:ext cx="720000" cy="720000"/>
-          </a:xfrm>
-          <a:prstGeom prst="ellipse">
-            <a:avLst/>
-          </a:prstGeom>
-          <a:solidFill>
-            <a:srgbClr val="6AB5FF"/>
-          </a:solidFill>
-        </p:spPr>
-        <p:style>
-          <a:lnRef idx="2">
-            <a:schemeClr val="accent1">
-              <a:shade val="15000"/>
-            </a:schemeClr>
-          </a:lnRef>
-          <a:fillRef idx="1">
-            <a:schemeClr val="accent1"/>
-          </a:fillRef>
-          <a:effectRef idx="0">
-            <a:schemeClr val="accent1"/>
-          </a:effectRef>
-          <a:fontRef idx="minor">
-            <a:schemeClr val="lt1"/>
-          </a:fontRef>
-        </p:style>
-        <p:txBody>
-          <a:bodyPr rtlCol="0" anchor="ctr"/>
-          <a:lstStyle/>
-          <a:p>
-            <a:pPr algn="ctr"/>
-            <a:r>
-              <a:rPr lang="en-US" sz="4000" b="1" dirty="0"/>
-              <a:t>1</a:t>
-            </a:r>
-          </a:p>
-        </p:txBody>
-      </p:sp>
-      <p:sp>
-        <p:nvSpPr>
-          <p:cNvPr id="8" name="Oval 7">
-            <a:extLst>
-              <a:ext uri="{FF2B5EF4-FFF2-40B4-BE49-F238E27FC236}">
-                <a16:creationId xmlns:a16="http://schemas.microsoft.com/office/drawing/2014/main" id="{899F8B4F-4D67-C26A-6CDC-0BB22BE3CB33}"/>
-              </a:ext>
-            </a:extLst>
-          </p:cNvPr>
-          <p:cNvSpPr/>
-          <p:nvPr/>
-        </p:nvSpPr>
-        <p:spPr>
-          <a:xfrm>
-            <a:off x="4647487" y="2722276"/>
-            <a:ext cx="720000" cy="720000"/>
-          </a:xfrm>
-          <a:prstGeom prst="ellipse">
-            <a:avLst/>
-          </a:prstGeom>
-          <a:solidFill>
-            <a:srgbClr val="6AB5FF"/>
-          </a:solidFill>
-        </p:spPr>
-        <p:style>
-          <a:lnRef idx="2">
-            <a:schemeClr val="accent1">
-              <a:shade val="15000"/>
-            </a:schemeClr>
-          </a:lnRef>
-          <a:fillRef idx="1">
-            <a:schemeClr val="accent1"/>
-          </a:fillRef>
-          <a:effectRef idx="0">
-            <a:schemeClr val="accent1"/>
-          </a:effectRef>
-          <a:fontRef idx="minor">
-            <a:schemeClr val="lt1"/>
-          </a:fontRef>
-        </p:style>
-        <p:txBody>
-          <a:bodyPr rtlCol="0" anchor="ctr"/>
-          <a:lstStyle/>
-          <a:p>
-            <a:pPr algn="ctr"/>
-            <a:r>
-              <a:rPr lang="en-US" sz="4000" b="1" dirty="0"/>
-              <a:t>2</a:t>
-            </a:r>
-          </a:p>
-        </p:txBody>
-      </p:sp>
-      <p:cxnSp>
-        <p:nvCxnSpPr>
-          <p:cNvPr id="9" name="Straight Connector 8">
-            <a:extLst>
-              <a:ext uri="{FF2B5EF4-FFF2-40B4-BE49-F238E27FC236}">
-                <a16:creationId xmlns:a16="http://schemas.microsoft.com/office/drawing/2014/main" id="{E0E13AA7-AED9-7C6F-A9B4-F65C779A72DA}"/>
-              </a:ext>
-            </a:extLst>
-          </p:cNvPr>
-          <p:cNvCxnSpPr>
-            <a:cxnSpLocks/>
-            <a:stCxn id="8" idx="7"/>
-            <a:endCxn id="7" idx="3"/>
-          </p:cNvCxnSpPr>
-          <p:nvPr/>
-        </p:nvCxnSpPr>
-        <p:spPr>
-          <a:xfrm flipV="1">
-            <a:off x="5262045" y="2251287"/>
-            <a:ext cx="457983" cy="576431"/>
-          </a:xfrm>
-          <a:prstGeom prst="line">
-            <a:avLst/>
-          </a:prstGeom>
-          <a:ln w="38100">
-            <a:solidFill>
-              <a:srgbClr val="AAAAAA"/>
-            </a:solidFill>
-          </a:ln>
-        </p:spPr>
-        <p:style>
-          <a:lnRef idx="1">
-            <a:schemeClr val="accent1"/>
-          </a:lnRef>
-          <a:fillRef idx="0">
-            <a:schemeClr val="accent1"/>
-          </a:fillRef>
-          <a:effectRef idx="0">
-            <a:schemeClr val="accent1"/>
-          </a:effectRef>
-          <a:fontRef idx="minor">
-            <a:schemeClr val="tx1"/>
-          </a:fontRef>
-        </p:style>
-      </p:cxnSp>
-      <p:sp>
-        <p:nvSpPr>
-          <p:cNvPr id="11" name="Oval 10">
-            <a:extLst>
-              <a:ext uri="{FF2B5EF4-FFF2-40B4-BE49-F238E27FC236}">
-                <a16:creationId xmlns:a16="http://schemas.microsoft.com/office/drawing/2014/main" id="{782E04B9-ADEE-B8D5-0DBC-9B0B1C888E24}"/>
-              </a:ext>
-            </a:extLst>
-          </p:cNvPr>
-          <p:cNvSpPr/>
-          <p:nvPr/>
-        </p:nvSpPr>
-        <p:spPr>
-          <a:xfrm>
-            <a:off x="3771073" y="3761099"/>
-            <a:ext cx="720000" cy="720000"/>
-          </a:xfrm>
-          <a:prstGeom prst="ellipse">
-            <a:avLst/>
-          </a:prstGeom>
-          <a:solidFill>
-            <a:srgbClr val="6AB5FF"/>
-          </a:solidFill>
-        </p:spPr>
-        <p:style>
-          <a:lnRef idx="2">
-            <a:schemeClr val="accent1">
-              <a:shade val="15000"/>
-            </a:schemeClr>
-          </a:lnRef>
-          <a:fillRef idx="1">
-            <a:schemeClr val="accent1"/>
-          </a:fillRef>
-          <a:effectRef idx="0">
-            <a:schemeClr val="accent1"/>
-          </a:effectRef>
-          <a:fontRef idx="minor">
-            <a:schemeClr val="lt1"/>
-          </a:fontRef>
-        </p:style>
-        <p:txBody>
-          <a:bodyPr rtlCol="0" anchor="ctr"/>
-          <a:lstStyle/>
-          <a:p>
-            <a:pPr algn="ctr"/>
-            <a:r>
-              <a:rPr lang="en-US" sz="4000" b="1" dirty="0"/>
-              <a:t>4</a:t>
-            </a:r>
-          </a:p>
-        </p:txBody>
-      </p:sp>
-      <p:cxnSp>
-        <p:nvCxnSpPr>
-          <p:cNvPr id="13" name="Straight Connector 12">
-            <a:extLst>
-              <a:ext uri="{FF2B5EF4-FFF2-40B4-BE49-F238E27FC236}">
-                <a16:creationId xmlns:a16="http://schemas.microsoft.com/office/drawing/2014/main" id="{4CCB31FB-776D-214B-BDCC-B404BC5C5F42}"/>
-              </a:ext>
-            </a:extLst>
-          </p:cNvPr>
-          <p:cNvCxnSpPr>
-            <a:cxnSpLocks/>
-            <a:stCxn id="11" idx="7"/>
-            <a:endCxn id="8" idx="3"/>
-          </p:cNvCxnSpPr>
-          <p:nvPr/>
-        </p:nvCxnSpPr>
-        <p:spPr>
-          <a:xfrm flipV="1">
-            <a:off x="4385631" y="3336834"/>
-            <a:ext cx="367298" cy="529707"/>
-          </a:xfrm>
-          <a:prstGeom prst="line">
-            <a:avLst/>
-          </a:prstGeom>
-          <a:ln w="38100">
-            <a:solidFill>
-              <a:srgbClr val="AAAAAA"/>
-            </a:solidFill>
-          </a:ln>
-        </p:spPr>
-        <p:style>
-          <a:lnRef idx="1">
-            <a:schemeClr val="accent1"/>
-          </a:lnRef>
-          <a:fillRef idx="0">
-            <a:schemeClr val="accent1"/>
-          </a:fillRef>
-          <a:effectRef idx="0">
-            <a:schemeClr val="accent1"/>
-          </a:effectRef>
-          <a:fontRef idx="minor">
-            <a:schemeClr val="tx1"/>
-          </a:fontRef>
-        </p:style>
-      </p:cxnSp>
-      <p:sp>
-        <p:nvSpPr>
-          <p:cNvPr id="15" name="Oval 14">
-            <a:extLst>
-              <a:ext uri="{FF2B5EF4-FFF2-40B4-BE49-F238E27FC236}">
-                <a16:creationId xmlns:a16="http://schemas.microsoft.com/office/drawing/2014/main" id="{848ED6D7-FEDB-8CD2-5901-C0BDC2B66CDB}"/>
-              </a:ext>
-            </a:extLst>
-          </p:cNvPr>
-          <p:cNvSpPr/>
-          <p:nvPr/>
-        </p:nvSpPr>
-        <p:spPr>
-          <a:xfrm>
-            <a:off x="6497954" y="2722276"/>
-            <a:ext cx="720000" cy="720000"/>
-          </a:xfrm>
-          <a:prstGeom prst="ellipse">
-            <a:avLst/>
-          </a:prstGeom>
-          <a:solidFill>
-            <a:srgbClr val="6AB5FF"/>
-          </a:solidFill>
-        </p:spPr>
-        <p:style>
-          <a:lnRef idx="2">
-            <a:schemeClr val="accent1">
-              <a:shade val="15000"/>
-            </a:schemeClr>
-          </a:lnRef>
-          <a:fillRef idx="1">
-            <a:schemeClr val="accent1"/>
-          </a:fillRef>
-          <a:effectRef idx="0">
-            <a:schemeClr val="accent1"/>
-          </a:effectRef>
-          <a:fontRef idx="minor">
-            <a:schemeClr val="lt1"/>
-          </a:fontRef>
-        </p:style>
-        <p:txBody>
-          <a:bodyPr rtlCol="0" anchor="ctr"/>
-          <a:lstStyle/>
-          <a:p>
-            <a:pPr algn="ctr"/>
-            <a:r>
-              <a:rPr lang="en-US" sz="4000" b="1" dirty="0"/>
-              <a:t>3</a:t>
-            </a:r>
-          </a:p>
-        </p:txBody>
-      </p:sp>
-      <p:cxnSp>
-        <p:nvCxnSpPr>
-          <p:cNvPr id="17" name="Straight Connector 16">
-            <a:extLst>
-              <a:ext uri="{FF2B5EF4-FFF2-40B4-BE49-F238E27FC236}">
-                <a16:creationId xmlns:a16="http://schemas.microsoft.com/office/drawing/2014/main" id="{E75FE023-62CE-6F92-13F1-D0E4D4B768D4}"/>
-              </a:ext>
-            </a:extLst>
-          </p:cNvPr>
-          <p:cNvCxnSpPr>
-            <a:cxnSpLocks/>
-            <a:stCxn id="15" idx="1"/>
-            <a:endCxn id="7" idx="5"/>
-          </p:cNvCxnSpPr>
-          <p:nvPr/>
-        </p:nvCxnSpPr>
-        <p:spPr>
-          <a:xfrm flipH="1" flipV="1">
-            <a:off x="6229144" y="2251287"/>
-            <a:ext cx="374252" cy="576431"/>
-          </a:xfrm>
-          <a:prstGeom prst="line">
-            <a:avLst/>
-          </a:prstGeom>
-          <a:ln w="38100">
-            <a:solidFill>
-              <a:srgbClr val="AAAAAA"/>
-            </a:solidFill>
-          </a:ln>
-        </p:spPr>
-        <p:style>
-          <a:lnRef idx="1">
-            <a:schemeClr val="accent1"/>
-          </a:lnRef>
-          <a:fillRef idx="0">
-            <a:schemeClr val="accent1"/>
-          </a:fillRef>
-          <a:effectRef idx="0">
-            <a:schemeClr val="accent1"/>
-          </a:effectRef>
-          <a:fontRef idx="minor">
-            <a:schemeClr val="tx1"/>
-          </a:fontRef>
-        </p:style>
-      </p:cxnSp>
-      <p:sp>
-        <p:nvSpPr>
-          <p:cNvPr id="18" name="Oval 17">
-            <a:extLst>
-              <a:ext uri="{FF2B5EF4-FFF2-40B4-BE49-F238E27FC236}">
-                <a16:creationId xmlns:a16="http://schemas.microsoft.com/office/drawing/2014/main" id="{2C074E43-0F0B-C2FB-03F8-54AA3CD607F1}"/>
-              </a:ext>
-            </a:extLst>
-          </p:cNvPr>
-          <p:cNvSpPr/>
-          <p:nvPr/>
-        </p:nvSpPr>
-        <p:spPr>
-          <a:xfrm>
-            <a:off x="5621540" y="3761099"/>
-            <a:ext cx="720000" cy="720000"/>
-          </a:xfrm>
-          <a:prstGeom prst="ellipse">
-            <a:avLst/>
-          </a:prstGeom>
-          <a:solidFill>
-            <a:srgbClr val="6AB5FF"/>
-          </a:solidFill>
-        </p:spPr>
-        <p:style>
-          <a:lnRef idx="2">
-            <a:schemeClr val="accent1">
-              <a:shade val="15000"/>
-            </a:schemeClr>
-          </a:lnRef>
-          <a:fillRef idx="1">
-            <a:schemeClr val="accent1"/>
-          </a:fillRef>
-          <a:effectRef idx="0">
-            <a:schemeClr val="accent1"/>
-          </a:effectRef>
-          <a:fontRef idx="minor">
-            <a:schemeClr val="lt1"/>
-          </a:fontRef>
-        </p:style>
-        <p:txBody>
-          <a:bodyPr rtlCol="0" anchor="ctr"/>
-          <a:lstStyle/>
-          <a:p>
-            <a:pPr algn="ctr"/>
-            <a:r>
-              <a:rPr lang="en-US" sz="4000" b="1" dirty="0"/>
-              <a:t>5</a:t>
-            </a:r>
-          </a:p>
-        </p:txBody>
-      </p:sp>
-      <p:cxnSp>
-        <p:nvCxnSpPr>
-          <p:cNvPr id="19" name="Straight Connector 18">
-            <a:extLst>
-              <a:ext uri="{FF2B5EF4-FFF2-40B4-BE49-F238E27FC236}">
-                <a16:creationId xmlns:a16="http://schemas.microsoft.com/office/drawing/2014/main" id="{6BE9FEC3-E29F-1FAE-C573-F705DB66679B}"/>
-              </a:ext>
-            </a:extLst>
-          </p:cNvPr>
-          <p:cNvCxnSpPr>
-            <a:cxnSpLocks/>
-            <a:stCxn id="18" idx="1"/>
-            <a:endCxn id="8" idx="5"/>
-          </p:cNvCxnSpPr>
-          <p:nvPr/>
-        </p:nvCxnSpPr>
-        <p:spPr>
-          <a:xfrm flipH="1" flipV="1">
-            <a:off x="5262045" y="3336834"/>
-            <a:ext cx="464937" cy="529707"/>
-          </a:xfrm>
-          <a:prstGeom prst="line">
-            <a:avLst/>
-          </a:prstGeom>
-          <a:ln w="38100">
-            <a:solidFill>
-              <a:srgbClr val="AAAAAA"/>
-            </a:solidFill>
-          </a:ln>
-        </p:spPr>
-        <p:style>
-          <a:lnRef idx="1">
-            <a:schemeClr val="accent1"/>
-          </a:lnRef>
-          <a:fillRef idx="0">
-            <a:schemeClr val="accent1"/>
-          </a:fillRef>
-          <a:effectRef idx="0">
-            <a:schemeClr val="accent1"/>
-          </a:effectRef>
-          <a:fontRef idx="minor">
-            <a:schemeClr val="tx1"/>
-          </a:fontRef>
-        </p:style>
-      </p:cxnSp>
-      <p:sp>
-        <p:nvSpPr>
-          <p:cNvPr id="85" name="TextBox 84">
-            <a:extLst>
-              <a:ext uri="{FF2B5EF4-FFF2-40B4-BE49-F238E27FC236}">
-                <a16:creationId xmlns:a16="http://schemas.microsoft.com/office/drawing/2014/main" id="{26E602BD-2A64-F86D-E073-E69DF36A7790}"/>
-              </a:ext>
-            </a:extLst>
-          </p:cNvPr>
-          <p:cNvSpPr txBox="1"/>
-          <p:nvPr/>
-        </p:nvSpPr>
-        <p:spPr>
-          <a:xfrm>
-            <a:off x="6687127" y="1730415"/>
-            <a:ext cx="3270807" cy="477054"/>
-          </a:xfrm>
-          <a:prstGeom prst="rect">
-            <a:avLst/>
-          </a:prstGeom>
-          <a:noFill/>
-        </p:spPr>
-        <p:txBody>
-          <a:bodyPr wrap="square">
-            <a:spAutoFit/>
-          </a:bodyPr>
-          <a:lstStyle/>
-          <a:p>
-            <a:pPr algn="ctr"/>
-            <a:r>
-              <a:rPr lang="en-PH" sz="2500" b="1" dirty="0">
-                <a:solidFill>
-                  <a:schemeClr val="bg1"/>
-                </a:solidFill>
-              </a:rPr>
-              <a:t>Height of Node 1 is two</a:t>
-            </a:r>
-            <a:endParaRPr lang="en-US" sz="2500" dirty="0">
-              <a:solidFill>
-                <a:schemeClr val="bg1"/>
-              </a:solidFill>
-            </a:endParaRPr>
-          </a:p>
-        </p:txBody>
-      </p:sp>
-      <p:sp>
-        <p:nvSpPr>
-          <p:cNvPr id="2" name="TextBox 1">
-            <a:extLst>
-              <a:ext uri="{FF2B5EF4-FFF2-40B4-BE49-F238E27FC236}">
-                <a16:creationId xmlns:a16="http://schemas.microsoft.com/office/drawing/2014/main" id="{01612CAB-2A76-3A50-D068-7F0AF2D7DFA2}"/>
-              </a:ext>
-            </a:extLst>
-          </p:cNvPr>
-          <p:cNvSpPr txBox="1"/>
-          <p:nvPr/>
-        </p:nvSpPr>
-        <p:spPr>
-          <a:xfrm>
-            <a:off x="7217954" y="2809401"/>
-            <a:ext cx="3450046" cy="477054"/>
-          </a:xfrm>
-          <a:prstGeom prst="rect">
-            <a:avLst/>
-          </a:prstGeom>
-          <a:noFill/>
-        </p:spPr>
-        <p:txBody>
-          <a:bodyPr wrap="square">
-            <a:spAutoFit/>
-          </a:bodyPr>
-          <a:lstStyle/>
-          <a:p>
-            <a:pPr algn="ctr"/>
-            <a:r>
-              <a:rPr lang="en-PH" sz="2500" b="1" dirty="0">
-                <a:solidFill>
-                  <a:schemeClr val="bg1"/>
-                </a:solidFill>
-              </a:rPr>
-              <a:t>Height of Node 3 is zero</a:t>
-            </a:r>
-            <a:endParaRPr lang="en-US" sz="2500" dirty="0">
-              <a:solidFill>
-                <a:schemeClr val="bg1"/>
-              </a:solidFill>
-            </a:endParaRPr>
-          </a:p>
-        </p:txBody>
-      </p:sp>
-      <p:sp>
-        <p:nvSpPr>
-          <p:cNvPr id="3" name="TextBox 2">
-            <a:extLst>
-              <a:ext uri="{FF2B5EF4-FFF2-40B4-BE49-F238E27FC236}">
-                <a16:creationId xmlns:a16="http://schemas.microsoft.com/office/drawing/2014/main" id="{6D2706F5-AE90-51AB-B380-9BEC8B006BB0}"/>
-              </a:ext>
-            </a:extLst>
-          </p:cNvPr>
-          <p:cNvSpPr txBox="1"/>
-          <p:nvPr/>
-        </p:nvSpPr>
-        <p:spPr>
-          <a:xfrm>
-            <a:off x="321027" y="3882572"/>
-            <a:ext cx="3450046" cy="477054"/>
-          </a:xfrm>
-          <a:prstGeom prst="rect">
-            <a:avLst/>
-          </a:prstGeom>
-          <a:noFill/>
-        </p:spPr>
-        <p:txBody>
-          <a:bodyPr wrap="square">
-            <a:spAutoFit/>
-          </a:bodyPr>
-          <a:lstStyle/>
-          <a:p>
-            <a:pPr algn="ctr"/>
-            <a:r>
-              <a:rPr lang="en-PH" sz="2500" b="1" dirty="0">
-                <a:solidFill>
-                  <a:schemeClr val="bg1"/>
-                </a:solidFill>
-              </a:rPr>
-              <a:t>Height of Node 4 is zero</a:t>
-            </a:r>
-            <a:endParaRPr lang="en-US" sz="2500" dirty="0">
-              <a:solidFill>
-                <a:schemeClr val="bg1"/>
-              </a:solidFill>
-            </a:endParaRPr>
-          </a:p>
-        </p:txBody>
-      </p:sp>
-      <p:sp>
-        <p:nvSpPr>
-          <p:cNvPr id="6" name="TextBox 5">
-            <a:extLst>
-              <a:ext uri="{FF2B5EF4-FFF2-40B4-BE49-F238E27FC236}">
-                <a16:creationId xmlns:a16="http://schemas.microsoft.com/office/drawing/2014/main" id="{D3BF4FB5-7252-8F92-7C3F-520E022C8DC3}"/>
-              </a:ext>
-            </a:extLst>
-          </p:cNvPr>
-          <p:cNvSpPr txBox="1"/>
-          <p:nvPr/>
-        </p:nvSpPr>
-        <p:spPr>
-          <a:xfrm>
-            <a:off x="1205643" y="2943428"/>
-            <a:ext cx="3450046" cy="477054"/>
-          </a:xfrm>
-          <a:prstGeom prst="rect">
-            <a:avLst/>
-          </a:prstGeom>
-          <a:noFill/>
-        </p:spPr>
-        <p:txBody>
-          <a:bodyPr wrap="square">
-            <a:spAutoFit/>
-          </a:bodyPr>
-          <a:lstStyle/>
-          <a:p>
-            <a:pPr algn="ctr"/>
-            <a:r>
-              <a:rPr lang="en-PH" sz="2500" b="1" dirty="0">
-                <a:solidFill>
-                  <a:schemeClr val="bg1"/>
-                </a:solidFill>
-              </a:rPr>
-              <a:t>Height of Node 2 is one</a:t>
-            </a:r>
-            <a:endParaRPr lang="en-US" sz="2500" dirty="0">
-              <a:solidFill>
-                <a:schemeClr val="bg1"/>
-              </a:solidFill>
-            </a:endParaRPr>
-          </a:p>
-        </p:txBody>
-      </p:sp>
-      <p:sp>
-        <p:nvSpPr>
-          <p:cNvPr id="10" name="TextBox 9">
-            <a:extLst>
-              <a:ext uri="{FF2B5EF4-FFF2-40B4-BE49-F238E27FC236}">
-                <a16:creationId xmlns:a16="http://schemas.microsoft.com/office/drawing/2014/main" id="{7E762BFC-7F9F-CE42-E5C1-168762A95F4E}"/>
-              </a:ext>
-            </a:extLst>
-          </p:cNvPr>
-          <p:cNvSpPr txBox="1"/>
-          <p:nvPr/>
-        </p:nvSpPr>
-        <p:spPr>
-          <a:xfrm>
-            <a:off x="6603396" y="3882572"/>
-            <a:ext cx="3450046" cy="477054"/>
-          </a:xfrm>
-          <a:prstGeom prst="rect">
-            <a:avLst/>
-          </a:prstGeom>
-          <a:noFill/>
-        </p:spPr>
-        <p:txBody>
-          <a:bodyPr wrap="square">
-            <a:spAutoFit/>
-          </a:bodyPr>
-          <a:lstStyle/>
-          <a:p>
-            <a:pPr algn="ctr"/>
-            <a:r>
-              <a:rPr lang="en-PH" sz="2500" b="1" dirty="0">
-                <a:solidFill>
-                  <a:schemeClr val="bg1"/>
-                </a:solidFill>
-              </a:rPr>
-              <a:t>Height of Node 5 is zero</a:t>
-            </a:r>
-            <a:endParaRPr lang="en-US" sz="2500" dirty="0">
-              <a:solidFill>
-                <a:schemeClr val="bg1"/>
-              </a:solidFill>
-            </a:endParaRPr>
-          </a:p>
-        </p:txBody>
-      </p:sp>
-    </p:spTree>
-    <p:extLst>
-      <p:ext uri="{BB962C8B-B14F-4D97-AF65-F5344CB8AC3E}">
-        <p14:creationId xmlns:p14="http://schemas.microsoft.com/office/powerpoint/2010/main" val="3748412060"/>
       </p:ext>
     </p:extLst>
   </p:cSld>
@@ -13471,6 +13643,799 @@
         <p:cNvPr id="1" name="">
           <a:extLst>
             <a:ext uri="{FF2B5EF4-FFF2-40B4-BE49-F238E27FC236}">
+              <a16:creationId xmlns:a16="http://schemas.microsoft.com/office/drawing/2014/main" id="{DE7793A5-39FB-5E52-0E96-43D8F317EBEB}"/>
+            </a:ext>
+          </a:extLst>
+        </p:cNvPr>
+        <p:cNvGrpSpPr/>
+        <p:nvPr/>
+      </p:nvGrpSpPr>
+      <p:grpSpPr>
+        <a:xfrm>
+          <a:off x="0" y="0"/>
+          <a:ext cx="0" cy="0"/>
+          <a:chOff x="0" y="0"/>
+          <a:chExt cx="0" cy="0"/>
+        </a:xfrm>
+      </p:grpSpPr>
+      <p:sp>
+        <p:nvSpPr>
+          <p:cNvPr id="5" name="Title 1">
+            <a:extLst>
+              <a:ext uri="{FF2B5EF4-FFF2-40B4-BE49-F238E27FC236}">
+                <a16:creationId xmlns:a16="http://schemas.microsoft.com/office/drawing/2014/main" id="{2BBD32CE-BC2F-E8FD-02E1-885A023D7B65}"/>
+              </a:ext>
+            </a:extLst>
+          </p:cNvPr>
+          <p:cNvSpPr>
+            <a:spLocks noGrp="1"/>
+          </p:cNvSpPr>
+          <p:nvPr>
+            <p:ph type="ctrTitle"/>
+          </p:nvPr>
+        </p:nvSpPr>
+        <p:spPr>
+          <a:xfrm>
+            <a:off x="1524000" y="497150"/>
+            <a:ext cx="9144000" cy="718459"/>
+          </a:xfrm>
+        </p:spPr>
+        <p:txBody>
+          <a:bodyPr>
+            <a:normAutofit fontScale="90000"/>
+          </a:bodyPr>
+          <a:lstStyle/>
+          <a:p>
+            <a:r>
+              <a:rPr lang="en-US" b="1" dirty="0">
+                <a:solidFill>
+                  <a:srgbClr val="00B050"/>
+                </a:solidFill>
+              </a:rPr>
+              <a:t>Height of a Node</a:t>
+            </a:r>
+            <a:endParaRPr lang="en-PH" dirty="0">
+              <a:solidFill>
+                <a:srgbClr val="00B050"/>
+              </a:solidFill>
+            </a:endParaRPr>
+          </a:p>
+        </p:txBody>
+      </p:sp>
+      <p:sp>
+        <p:nvSpPr>
+          <p:cNvPr id="4" name="TextBox 3">
+            <a:extLst>
+              <a:ext uri="{FF2B5EF4-FFF2-40B4-BE49-F238E27FC236}">
+                <a16:creationId xmlns:a16="http://schemas.microsoft.com/office/drawing/2014/main" id="{5B8A71E4-F989-5857-DC8C-2F9DF1B93C4C}"/>
+              </a:ext>
+            </a:extLst>
+          </p:cNvPr>
+          <p:cNvSpPr txBox="1"/>
+          <p:nvPr/>
+        </p:nvSpPr>
+        <p:spPr>
+          <a:xfrm>
+            <a:off x="609600" y="5469819"/>
+            <a:ext cx="10972800" cy="477054"/>
+          </a:xfrm>
+          <a:prstGeom prst="rect">
+            <a:avLst/>
+          </a:prstGeom>
+          <a:noFill/>
+        </p:spPr>
+        <p:txBody>
+          <a:bodyPr wrap="square">
+            <a:spAutoFit/>
+          </a:bodyPr>
+          <a:lstStyle/>
+          <a:p>
+            <a:pPr algn="ctr"/>
+            <a:r>
+              <a:rPr lang="en-US" sz="2500" dirty="0">
+                <a:solidFill>
+                  <a:schemeClr val="bg1"/>
+                </a:solidFill>
+              </a:rPr>
+              <a:t>Because both nodes 4 and 5 are leaf nodes, their height is zero</a:t>
+            </a:r>
+          </a:p>
+        </p:txBody>
+      </p:sp>
+      <p:sp>
+        <p:nvSpPr>
+          <p:cNvPr id="7" name="Oval 6">
+            <a:extLst>
+              <a:ext uri="{FF2B5EF4-FFF2-40B4-BE49-F238E27FC236}">
+                <a16:creationId xmlns:a16="http://schemas.microsoft.com/office/drawing/2014/main" id="{CD8E64CF-2FDF-BD2E-6B7A-2238FB4EBB29}"/>
+              </a:ext>
+            </a:extLst>
+          </p:cNvPr>
+          <p:cNvSpPr/>
+          <p:nvPr/>
+        </p:nvSpPr>
+        <p:spPr>
+          <a:xfrm>
+            <a:off x="5614586" y="1636729"/>
+            <a:ext cx="720000" cy="720000"/>
+          </a:xfrm>
+          <a:prstGeom prst="ellipse">
+            <a:avLst/>
+          </a:prstGeom>
+          <a:solidFill>
+            <a:srgbClr val="6AB5FF"/>
+          </a:solidFill>
+        </p:spPr>
+        <p:style>
+          <a:lnRef idx="2">
+            <a:schemeClr val="accent1">
+              <a:shade val="15000"/>
+            </a:schemeClr>
+          </a:lnRef>
+          <a:fillRef idx="1">
+            <a:schemeClr val="accent1"/>
+          </a:fillRef>
+          <a:effectRef idx="0">
+            <a:schemeClr val="accent1"/>
+          </a:effectRef>
+          <a:fontRef idx="minor">
+            <a:schemeClr val="lt1"/>
+          </a:fontRef>
+        </p:style>
+        <p:txBody>
+          <a:bodyPr rtlCol="0" anchor="ctr"/>
+          <a:lstStyle/>
+          <a:p>
+            <a:pPr algn="ctr"/>
+            <a:r>
+              <a:rPr lang="en-US" sz="4000" b="1" dirty="0"/>
+              <a:t>1</a:t>
+            </a:r>
+          </a:p>
+        </p:txBody>
+      </p:sp>
+      <p:sp>
+        <p:nvSpPr>
+          <p:cNvPr id="8" name="Oval 7">
+            <a:extLst>
+              <a:ext uri="{FF2B5EF4-FFF2-40B4-BE49-F238E27FC236}">
+                <a16:creationId xmlns:a16="http://schemas.microsoft.com/office/drawing/2014/main" id="{899F8B4F-4D67-C26A-6CDC-0BB22BE3CB33}"/>
+              </a:ext>
+            </a:extLst>
+          </p:cNvPr>
+          <p:cNvSpPr/>
+          <p:nvPr/>
+        </p:nvSpPr>
+        <p:spPr>
+          <a:xfrm>
+            <a:off x="4647487" y="2722276"/>
+            <a:ext cx="720000" cy="720000"/>
+          </a:xfrm>
+          <a:prstGeom prst="ellipse">
+            <a:avLst/>
+          </a:prstGeom>
+          <a:solidFill>
+            <a:srgbClr val="6AB5FF"/>
+          </a:solidFill>
+        </p:spPr>
+        <p:style>
+          <a:lnRef idx="2">
+            <a:schemeClr val="accent1">
+              <a:shade val="15000"/>
+            </a:schemeClr>
+          </a:lnRef>
+          <a:fillRef idx="1">
+            <a:schemeClr val="accent1"/>
+          </a:fillRef>
+          <a:effectRef idx="0">
+            <a:schemeClr val="accent1"/>
+          </a:effectRef>
+          <a:fontRef idx="minor">
+            <a:schemeClr val="lt1"/>
+          </a:fontRef>
+        </p:style>
+        <p:txBody>
+          <a:bodyPr rtlCol="0" anchor="ctr"/>
+          <a:lstStyle/>
+          <a:p>
+            <a:pPr algn="ctr"/>
+            <a:r>
+              <a:rPr lang="en-US" sz="4000" b="1" dirty="0"/>
+              <a:t>2</a:t>
+            </a:r>
+          </a:p>
+        </p:txBody>
+      </p:sp>
+      <p:cxnSp>
+        <p:nvCxnSpPr>
+          <p:cNvPr id="9" name="Straight Connector 8">
+            <a:extLst>
+              <a:ext uri="{FF2B5EF4-FFF2-40B4-BE49-F238E27FC236}">
+                <a16:creationId xmlns:a16="http://schemas.microsoft.com/office/drawing/2014/main" id="{E0E13AA7-AED9-7C6F-A9B4-F65C779A72DA}"/>
+              </a:ext>
+            </a:extLst>
+          </p:cNvPr>
+          <p:cNvCxnSpPr>
+            <a:cxnSpLocks/>
+            <a:stCxn id="8" idx="7"/>
+            <a:endCxn id="7" idx="3"/>
+          </p:cNvCxnSpPr>
+          <p:nvPr/>
+        </p:nvCxnSpPr>
+        <p:spPr>
+          <a:xfrm flipV="1">
+            <a:off x="5262045" y="2251287"/>
+            <a:ext cx="457983" cy="576431"/>
+          </a:xfrm>
+          <a:prstGeom prst="line">
+            <a:avLst/>
+          </a:prstGeom>
+          <a:ln w="38100">
+            <a:solidFill>
+              <a:srgbClr val="AAAAAA"/>
+            </a:solidFill>
+          </a:ln>
+        </p:spPr>
+        <p:style>
+          <a:lnRef idx="1">
+            <a:schemeClr val="accent1"/>
+          </a:lnRef>
+          <a:fillRef idx="0">
+            <a:schemeClr val="accent1"/>
+          </a:fillRef>
+          <a:effectRef idx="0">
+            <a:schemeClr val="accent1"/>
+          </a:effectRef>
+          <a:fontRef idx="minor">
+            <a:schemeClr val="tx1"/>
+          </a:fontRef>
+        </p:style>
+      </p:cxnSp>
+      <p:sp>
+        <p:nvSpPr>
+          <p:cNvPr id="11" name="Oval 10">
+            <a:extLst>
+              <a:ext uri="{FF2B5EF4-FFF2-40B4-BE49-F238E27FC236}">
+                <a16:creationId xmlns:a16="http://schemas.microsoft.com/office/drawing/2014/main" id="{782E04B9-ADEE-B8D5-0DBC-9B0B1C888E24}"/>
+              </a:ext>
+            </a:extLst>
+          </p:cNvPr>
+          <p:cNvSpPr/>
+          <p:nvPr/>
+        </p:nvSpPr>
+        <p:spPr>
+          <a:xfrm>
+            <a:off x="3771073" y="3761099"/>
+            <a:ext cx="720000" cy="720000"/>
+          </a:xfrm>
+          <a:prstGeom prst="ellipse">
+            <a:avLst/>
+          </a:prstGeom>
+          <a:solidFill>
+            <a:srgbClr val="6AB5FF"/>
+          </a:solidFill>
+        </p:spPr>
+        <p:style>
+          <a:lnRef idx="2">
+            <a:schemeClr val="accent1">
+              <a:shade val="15000"/>
+            </a:schemeClr>
+          </a:lnRef>
+          <a:fillRef idx="1">
+            <a:schemeClr val="accent1"/>
+          </a:fillRef>
+          <a:effectRef idx="0">
+            <a:schemeClr val="accent1"/>
+          </a:effectRef>
+          <a:fontRef idx="minor">
+            <a:schemeClr val="lt1"/>
+          </a:fontRef>
+        </p:style>
+        <p:txBody>
+          <a:bodyPr rtlCol="0" anchor="ctr"/>
+          <a:lstStyle/>
+          <a:p>
+            <a:pPr algn="ctr"/>
+            <a:r>
+              <a:rPr lang="en-US" sz="4000" b="1" dirty="0"/>
+              <a:t>4</a:t>
+            </a:r>
+          </a:p>
+        </p:txBody>
+      </p:sp>
+      <p:cxnSp>
+        <p:nvCxnSpPr>
+          <p:cNvPr id="13" name="Straight Connector 12">
+            <a:extLst>
+              <a:ext uri="{FF2B5EF4-FFF2-40B4-BE49-F238E27FC236}">
+                <a16:creationId xmlns:a16="http://schemas.microsoft.com/office/drawing/2014/main" id="{4CCB31FB-776D-214B-BDCC-B404BC5C5F42}"/>
+              </a:ext>
+            </a:extLst>
+          </p:cNvPr>
+          <p:cNvCxnSpPr>
+            <a:cxnSpLocks/>
+            <a:stCxn id="11" idx="7"/>
+            <a:endCxn id="8" idx="3"/>
+          </p:cNvCxnSpPr>
+          <p:nvPr/>
+        </p:nvCxnSpPr>
+        <p:spPr>
+          <a:xfrm flipV="1">
+            <a:off x="4385631" y="3336834"/>
+            <a:ext cx="367298" cy="529707"/>
+          </a:xfrm>
+          <a:prstGeom prst="line">
+            <a:avLst/>
+          </a:prstGeom>
+          <a:ln w="38100">
+            <a:solidFill>
+              <a:srgbClr val="AAAAAA"/>
+            </a:solidFill>
+          </a:ln>
+        </p:spPr>
+        <p:style>
+          <a:lnRef idx="1">
+            <a:schemeClr val="accent1"/>
+          </a:lnRef>
+          <a:fillRef idx="0">
+            <a:schemeClr val="accent1"/>
+          </a:fillRef>
+          <a:effectRef idx="0">
+            <a:schemeClr val="accent1"/>
+          </a:effectRef>
+          <a:fontRef idx="minor">
+            <a:schemeClr val="tx1"/>
+          </a:fontRef>
+        </p:style>
+      </p:cxnSp>
+      <p:sp>
+        <p:nvSpPr>
+          <p:cNvPr id="15" name="Oval 14">
+            <a:extLst>
+              <a:ext uri="{FF2B5EF4-FFF2-40B4-BE49-F238E27FC236}">
+                <a16:creationId xmlns:a16="http://schemas.microsoft.com/office/drawing/2014/main" id="{848ED6D7-FEDB-8CD2-5901-C0BDC2B66CDB}"/>
+              </a:ext>
+            </a:extLst>
+          </p:cNvPr>
+          <p:cNvSpPr/>
+          <p:nvPr/>
+        </p:nvSpPr>
+        <p:spPr>
+          <a:xfrm>
+            <a:off x="6497954" y="2722276"/>
+            <a:ext cx="720000" cy="720000"/>
+          </a:xfrm>
+          <a:prstGeom prst="ellipse">
+            <a:avLst/>
+          </a:prstGeom>
+          <a:solidFill>
+            <a:srgbClr val="6AB5FF"/>
+          </a:solidFill>
+        </p:spPr>
+        <p:style>
+          <a:lnRef idx="2">
+            <a:schemeClr val="accent1">
+              <a:shade val="15000"/>
+            </a:schemeClr>
+          </a:lnRef>
+          <a:fillRef idx="1">
+            <a:schemeClr val="accent1"/>
+          </a:fillRef>
+          <a:effectRef idx="0">
+            <a:schemeClr val="accent1"/>
+          </a:effectRef>
+          <a:fontRef idx="minor">
+            <a:schemeClr val="lt1"/>
+          </a:fontRef>
+        </p:style>
+        <p:txBody>
+          <a:bodyPr rtlCol="0" anchor="ctr"/>
+          <a:lstStyle/>
+          <a:p>
+            <a:pPr algn="ctr"/>
+            <a:r>
+              <a:rPr lang="en-US" sz="4000" b="1" dirty="0"/>
+              <a:t>3</a:t>
+            </a:r>
+          </a:p>
+        </p:txBody>
+      </p:sp>
+      <p:cxnSp>
+        <p:nvCxnSpPr>
+          <p:cNvPr id="17" name="Straight Connector 16">
+            <a:extLst>
+              <a:ext uri="{FF2B5EF4-FFF2-40B4-BE49-F238E27FC236}">
+                <a16:creationId xmlns:a16="http://schemas.microsoft.com/office/drawing/2014/main" id="{E75FE023-62CE-6F92-13F1-D0E4D4B768D4}"/>
+              </a:ext>
+            </a:extLst>
+          </p:cNvPr>
+          <p:cNvCxnSpPr>
+            <a:cxnSpLocks/>
+            <a:stCxn id="15" idx="1"/>
+            <a:endCxn id="7" idx="5"/>
+          </p:cNvCxnSpPr>
+          <p:nvPr/>
+        </p:nvCxnSpPr>
+        <p:spPr>
+          <a:xfrm flipH="1" flipV="1">
+            <a:off x="6229144" y="2251287"/>
+            <a:ext cx="374252" cy="576431"/>
+          </a:xfrm>
+          <a:prstGeom prst="line">
+            <a:avLst/>
+          </a:prstGeom>
+          <a:ln w="38100">
+            <a:solidFill>
+              <a:srgbClr val="AAAAAA"/>
+            </a:solidFill>
+          </a:ln>
+        </p:spPr>
+        <p:style>
+          <a:lnRef idx="1">
+            <a:schemeClr val="accent1"/>
+          </a:lnRef>
+          <a:fillRef idx="0">
+            <a:schemeClr val="accent1"/>
+          </a:fillRef>
+          <a:effectRef idx="0">
+            <a:schemeClr val="accent1"/>
+          </a:effectRef>
+          <a:fontRef idx="minor">
+            <a:schemeClr val="tx1"/>
+          </a:fontRef>
+        </p:style>
+      </p:cxnSp>
+      <p:sp>
+        <p:nvSpPr>
+          <p:cNvPr id="18" name="Oval 17">
+            <a:extLst>
+              <a:ext uri="{FF2B5EF4-FFF2-40B4-BE49-F238E27FC236}">
+                <a16:creationId xmlns:a16="http://schemas.microsoft.com/office/drawing/2014/main" id="{2C074E43-0F0B-C2FB-03F8-54AA3CD607F1}"/>
+              </a:ext>
+            </a:extLst>
+          </p:cNvPr>
+          <p:cNvSpPr/>
+          <p:nvPr/>
+        </p:nvSpPr>
+        <p:spPr>
+          <a:xfrm>
+            <a:off x="5621540" y="3761099"/>
+            <a:ext cx="720000" cy="720000"/>
+          </a:xfrm>
+          <a:prstGeom prst="ellipse">
+            <a:avLst/>
+          </a:prstGeom>
+          <a:solidFill>
+            <a:srgbClr val="6AB5FF"/>
+          </a:solidFill>
+        </p:spPr>
+        <p:style>
+          <a:lnRef idx="2">
+            <a:schemeClr val="accent1">
+              <a:shade val="15000"/>
+            </a:schemeClr>
+          </a:lnRef>
+          <a:fillRef idx="1">
+            <a:schemeClr val="accent1"/>
+          </a:fillRef>
+          <a:effectRef idx="0">
+            <a:schemeClr val="accent1"/>
+          </a:effectRef>
+          <a:fontRef idx="minor">
+            <a:schemeClr val="lt1"/>
+          </a:fontRef>
+        </p:style>
+        <p:txBody>
+          <a:bodyPr rtlCol="0" anchor="ctr"/>
+          <a:lstStyle/>
+          <a:p>
+            <a:pPr algn="ctr"/>
+            <a:r>
+              <a:rPr lang="en-US" sz="4000" b="1" dirty="0"/>
+              <a:t>5</a:t>
+            </a:r>
+          </a:p>
+        </p:txBody>
+      </p:sp>
+      <p:cxnSp>
+        <p:nvCxnSpPr>
+          <p:cNvPr id="19" name="Straight Connector 18">
+            <a:extLst>
+              <a:ext uri="{FF2B5EF4-FFF2-40B4-BE49-F238E27FC236}">
+                <a16:creationId xmlns:a16="http://schemas.microsoft.com/office/drawing/2014/main" id="{6BE9FEC3-E29F-1FAE-C573-F705DB66679B}"/>
+              </a:ext>
+            </a:extLst>
+          </p:cNvPr>
+          <p:cNvCxnSpPr>
+            <a:cxnSpLocks/>
+            <a:stCxn id="18" idx="1"/>
+            <a:endCxn id="8" idx="5"/>
+          </p:cNvCxnSpPr>
+          <p:nvPr/>
+        </p:nvCxnSpPr>
+        <p:spPr>
+          <a:xfrm flipH="1" flipV="1">
+            <a:off x="5262045" y="3336834"/>
+            <a:ext cx="464937" cy="529707"/>
+          </a:xfrm>
+          <a:prstGeom prst="line">
+            <a:avLst/>
+          </a:prstGeom>
+          <a:ln w="38100">
+            <a:solidFill>
+              <a:srgbClr val="AAAAAA"/>
+            </a:solidFill>
+          </a:ln>
+        </p:spPr>
+        <p:style>
+          <a:lnRef idx="1">
+            <a:schemeClr val="accent1"/>
+          </a:lnRef>
+          <a:fillRef idx="0">
+            <a:schemeClr val="accent1"/>
+          </a:fillRef>
+          <a:effectRef idx="0">
+            <a:schemeClr val="accent1"/>
+          </a:effectRef>
+          <a:fontRef idx="minor">
+            <a:schemeClr val="tx1"/>
+          </a:fontRef>
+        </p:style>
+      </p:cxnSp>
+      <p:sp>
+        <p:nvSpPr>
+          <p:cNvPr id="85" name="TextBox 84">
+            <a:extLst>
+              <a:ext uri="{FF2B5EF4-FFF2-40B4-BE49-F238E27FC236}">
+                <a16:creationId xmlns:a16="http://schemas.microsoft.com/office/drawing/2014/main" id="{26E602BD-2A64-F86D-E073-E69DF36A7790}"/>
+              </a:ext>
+            </a:extLst>
+          </p:cNvPr>
+          <p:cNvSpPr txBox="1"/>
+          <p:nvPr/>
+        </p:nvSpPr>
+        <p:spPr>
+          <a:xfrm>
+            <a:off x="6687127" y="1730415"/>
+            <a:ext cx="3270807" cy="477054"/>
+          </a:xfrm>
+          <a:prstGeom prst="rect">
+            <a:avLst/>
+          </a:prstGeom>
+          <a:noFill/>
+        </p:spPr>
+        <p:txBody>
+          <a:bodyPr wrap="square">
+            <a:spAutoFit/>
+          </a:bodyPr>
+          <a:lstStyle/>
+          <a:p>
+            <a:pPr algn="ctr"/>
+            <a:r>
+              <a:rPr lang="en-PH" sz="2500" b="1" dirty="0">
+                <a:solidFill>
+                  <a:schemeClr val="bg1"/>
+                </a:solidFill>
+              </a:rPr>
+              <a:t>Height of Node 1 is two</a:t>
+            </a:r>
+            <a:endParaRPr lang="en-US" sz="2500" dirty="0">
+              <a:solidFill>
+                <a:schemeClr val="bg1"/>
+              </a:solidFill>
+            </a:endParaRPr>
+          </a:p>
+        </p:txBody>
+      </p:sp>
+      <p:sp>
+        <p:nvSpPr>
+          <p:cNvPr id="2" name="TextBox 1">
+            <a:extLst>
+              <a:ext uri="{FF2B5EF4-FFF2-40B4-BE49-F238E27FC236}">
+                <a16:creationId xmlns:a16="http://schemas.microsoft.com/office/drawing/2014/main" id="{01612CAB-2A76-3A50-D068-7F0AF2D7DFA2}"/>
+              </a:ext>
+            </a:extLst>
+          </p:cNvPr>
+          <p:cNvSpPr txBox="1"/>
+          <p:nvPr/>
+        </p:nvSpPr>
+        <p:spPr>
+          <a:xfrm>
+            <a:off x="7217954" y="2809401"/>
+            <a:ext cx="3450046" cy="477054"/>
+          </a:xfrm>
+          <a:prstGeom prst="rect">
+            <a:avLst/>
+          </a:prstGeom>
+          <a:noFill/>
+        </p:spPr>
+        <p:txBody>
+          <a:bodyPr wrap="square">
+            <a:spAutoFit/>
+          </a:bodyPr>
+          <a:lstStyle/>
+          <a:p>
+            <a:pPr algn="ctr"/>
+            <a:r>
+              <a:rPr lang="en-PH" sz="2500" b="1" dirty="0">
+                <a:solidFill>
+                  <a:schemeClr val="bg1"/>
+                </a:solidFill>
+              </a:rPr>
+              <a:t>Height of Node 3 is zero</a:t>
+            </a:r>
+            <a:endParaRPr lang="en-US" sz="2500" dirty="0">
+              <a:solidFill>
+                <a:schemeClr val="bg1"/>
+              </a:solidFill>
+            </a:endParaRPr>
+          </a:p>
+        </p:txBody>
+      </p:sp>
+      <p:sp>
+        <p:nvSpPr>
+          <p:cNvPr id="3" name="TextBox 2">
+            <a:extLst>
+              <a:ext uri="{FF2B5EF4-FFF2-40B4-BE49-F238E27FC236}">
+                <a16:creationId xmlns:a16="http://schemas.microsoft.com/office/drawing/2014/main" id="{6D2706F5-AE90-51AB-B380-9BEC8B006BB0}"/>
+              </a:ext>
+            </a:extLst>
+          </p:cNvPr>
+          <p:cNvSpPr txBox="1"/>
+          <p:nvPr/>
+        </p:nvSpPr>
+        <p:spPr>
+          <a:xfrm>
+            <a:off x="321027" y="3882572"/>
+            <a:ext cx="3450046" cy="477054"/>
+          </a:xfrm>
+          <a:prstGeom prst="rect">
+            <a:avLst/>
+          </a:prstGeom>
+          <a:noFill/>
+        </p:spPr>
+        <p:txBody>
+          <a:bodyPr wrap="square">
+            <a:spAutoFit/>
+          </a:bodyPr>
+          <a:lstStyle/>
+          <a:p>
+            <a:pPr algn="ctr"/>
+            <a:r>
+              <a:rPr lang="en-PH" sz="2500" b="1" dirty="0">
+                <a:solidFill>
+                  <a:schemeClr val="bg1"/>
+                </a:solidFill>
+              </a:rPr>
+              <a:t>Height of Node 4 is zero</a:t>
+            </a:r>
+            <a:endParaRPr lang="en-US" sz="2500" dirty="0">
+              <a:solidFill>
+                <a:schemeClr val="bg1"/>
+              </a:solidFill>
+            </a:endParaRPr>
+          </a:p>
+        </p:txBody>
+      </p:sp>
+      <p:sp>
+        <p:nvSpPr>
+          <p:cNvPr id="6" name="TextBox 5">
+            <a:extLst>
+              <a:ext uri="{FF2B5EF4-FFF2-40B4-BE49-F238E27FC236}">
+                <a16:creationId xmlns:a16="http://schemas.microsoft.com/office/drawing/2014/main" id="{D3BF4FB5-7252-8F92-7C3F-520E022C8DC3}"/>
+              </a:ext>
+            </a:extLst>
+          </p:cNvPr>
+          <p:cNvSpPr txBox="1"/>
+          <p:nvPr/>
+        </p:nvSpPr>
+        <p:spPr>
+          <a:xfrm>
+            <a:off x="1205643" y="2943428"/>
+            <a:ext cx="3450046" cy="477054"/>
+          </a:xfrm>
+          <a:prstGeom prst="rect">
+            <a:avLst/>
+          </a:prstGeom>
+          <a:noFill/>
+        </p:spPr>
+        <p:txBody>
+          <a:bodyPr wrap="square">
+            <a:spAutoFit/>
+          </a:bodyPr>
+          <a:lstStyle/>
+          <a:p>
+            <a:pPr algn="ctr"/>
+            <a:r>
+              <a:rPr lang="en-PH" sz="2500" b="1" dirty="0">
+                <a:solidFill>
+                  <a:schemeClr val="bg1"/>
+                </a:solidFill>
+              </a:rPr>
+              <a:t>Height of Node 2 is one</a:t>
+            </a:r>
+            <a:endParaRPr lang="en-US" sz="2500" dirty="0">
+              <a:solidFill>
+                <a:schemeClr val="bg1"/>
+              </a:solidFill>
+            </a:endParaRPr>
+          </a:p>
+        </p:txBody>
+      </p:sp>
+      <p:sp>
+        <p:nvSpPr>
+          <p:cNvPr id="10" name="TextBox 9">
+            <a:extLst>
+              <a:ext uri="{FF2B5EF4-FFF2-40B4-BE49-F238E27FC236}">
+                <a16:creationId xmlns:a16="http://schemas.microsoft.com/office/drawing/2014/main" id="{7E762BFC-7F9F-CE42-E5C1-168762A95F4E}"/>
+              </a:ext>
+            </a:extLst>
+          </p:cNvPr>
+          <p:cNvSpPr txBox="1"/>
+          <p:nvPr/>
+        </p:nvSpPr>
+        <p:spPr>
+          <a:xfrm>
+            <a:off x="6603396" y="3882572"/>
+            <a:ext cx="3450046" cy="477054"/>
+          </a:xfrm>
+          <a:prstGeom prst="rect">
+            <a:avLst/>
+          </a:prstGeom>
+          <a:noFill/>
+        </p:spPr>
+        <p:txBody>
+          <a:bodyPr wrap="square">
+            <a:spAutoFit/>
+          </a:bodyPr>
+          <a:lstStyle/>
+          <a:p>
+            <a:pPr algn="ctr"/>
+            <a:r>
+              <a:rPr lang="en-PH" sz="2500" b="1" dirty="0">
+                <a:solidFill>
+                  <a:schemeClr val="bg1"/>
+                </a:solidFill>
+              </a:rPr>
+              <a:t>Height of Node 5 is zero</a:t>
+            </a:r>
+            <a:endParaRPr lang="en-US" sz="2500" dirty="0">
+              <a:solidFill>
+                <a:schemeClr val="bg1"/>
+              </a:solidFill>
+            </a:endParaRPr>
+          </a:p>
+        </p:txBody>
+      </p:sp>
+    </p:spTree>
+    <p:extLst>
+      <p:ext uri="{BB962C8B-B14F-4D97-AF65-F5344CB8AC3E}">
+        <p14:creationId xmlns:p14="http://schemas.microsoft.com/office/powerpoint/2010/main" val="3748412060"/>
+      </p:ext>
+    </p:extLst>
+  </p:cSld>
+  <p:clrMapOvr>
+    <a:masterClrMapping/>
+  </p:clrMapOvr>
+</p:sld>
+</file>
+
+<file path=ppt/slides/slide21.xml><?xml version="1.0" encoding="utf-8"?>
+<p:sld xmlns:a="http://schemas.openxmlformats.org/drawingml/2006/main" xmlns:r="http://schemas.openxmlformats.org/officeDocument/2006/relationships" xmlns:p="http://schemas.openxmlformats.org/presentationml/2006/main">
+  <p:cSld>
+    <p:bg>
+      <p:bgPr>
+        <a:solidFill>
+          <a:schemeClr val="tx1"/>
+        </a:solidFill>
+        <a:effectLst/>
+      </p:bgPr>
+    </p:bg>
+    <p:spTree>
+      <p:nvGrpSpPr>
+        <p:cNvPr id="1" name="">
+          <a:extLst>
+            <a:ext uri="{FF2B5EF4-FFF2-40B4-BE49-F238E27FC236}">
               <a16:creationId xmlns:a16="http://schemas.microsoft.com/office/drawing/2014/main" id="{B967580A-C305-1C90-E530-7CB6AA108EFA}"/>
             </a:ext>
           </a:extLst>
@@ -14208,7 +15173,7 @@
 </p:sld>
 </file>
 
-<file path=ppt/slides/slide21.xml><?xml version="1.0" encoding="utf-8"?>
+<file path=ppt/slides/slide22.xml><?xml version="1.0" encoding="utf-8"?>
 <p:sld xmlns:a="http://schemas.openxmlformats.org/drawingml/2006/main" xmlns:r="http://schemas.openxmlformats.org/officeDocument/2006/relationships" xmlns:p="http://schemas.openxmlformats.org/presentationml/2006/main">
   <p:cSld>
     <p:bg>
@@ -14781,7 +15746,7 @@
 </p:sld>
 </file>
 
-<file path=ppt/slides/slide22.xml><?xml version="1.0" encoding="utf-8"?>
+<file path=ppt/slides/slide23.xml><?xml version="1.0" encoding="utf-8"?>
 <p:sld xmlns:a="http://schemas.openxmlformats.org/drawingml/2006/main" xmlns:r="http://schemas.openxmlformats.org/officeDocument/2006/relationships" xmlns:p="http://schemas.openxmlformats.org/presentationml/2006/main">
   <p:cSld>
     <p:bg>
@@ -15399,7 +16364,7 @@
 </p:sld>
 </file>
 
-<file path=ppt/slides/slide23.xml><?xml version="1.0" encoding="utf-8"?>
+<file path=ppt/slides/slide24.xml><?xml version="1.0" encoding="utf-8"?>
 <p:sld xmlns:a="http://schemas.openxmlformats.org/drawingml/2006/main" xmlns:r="http://schemas.openxmlformats.org/officeDocument/2006/relationships" xmlns:p="http://schemas.openxmlformats.org/presentationml/2006/main">
   <p:cSld>
     <p:bg>
@@ -16107,7 +17072,7 @@
 </p:sld>
 </file>
 
-<file path=ppt/slides/slide24.xml><?xml version="1.0" encoding="utf-8"?>
+<file path=ppt/slides/slide25.xml><?xml version="1.0" encoding="utf-8"?>
 <p:sld xmlns:a="http://schemas.openxmlformats.org/drawingml/2006/main" xmlns:r="http://schemas.openxmlformats.org/officeDocument/2006/relationships" xmlns:p="http://schemas.openxmlformats.org/presentationml/2006/main">
   <p:cSld>
     <p:bg>
@@ -16905,7 +17870,7 @@
 </p:sld>
 </file>
 
-<file path=ppt/slides/slide25.xml><?xml version="1.0" encoding="utf-8"?>
+<file path=ppt/slides/slide26.xml><?xml version="1.0" encoding="utf-8"?>
 <p:sld xmlns:a="http://schemas.openxmlformats.org/drawingml/2006/main" xmlns:r="http://schemas.openxmlformats.org/officeDocument/2006/relationships" xmlns:p="http://schemas.openxmlformats.org/presentationml/2006/main">
   <p:cSld>
     <p:bg>
